--- a/S1-CL1-Cloud-Design-Build/delivery/topic_09/Topic_09_Slides.pptx
+++ b/S1-CL1-Cloud-Design-Build/delivery/topic_09/Topic_09_Slides.pptx
@@ -3700,7 +3700,7 @@
           <a:noFill/>
         </p:spPr>
         <p:txBody>
-          <a:bodyPr wrap="square" anchor="t" lIns="0" rIns="0" tIns="0" bIns="0">
+          <a:bodyPr wrap="square" anchor="ctr" lIns="0" rIns="0" tIns="0" bIns="0">
             <a:spAutoFit/>
           </a:bodyPr>
           <a:lstStyle/>
@@ -3717,7 +3717,7 @@
               </a:spcAft>
             </a:pPr>
             <a:r>
-              <a:rPr sz="1800" b="1" i="0">
+              <a:rPr sz="2400" b="1" i="0">
                 <a:solidFill>
                   <a:srgbClr val="EDAB0C"/>
                 </a:solidFill>
@@ -3726,7 +3726,7 @@
               <a:t>■  </a:t>
             </a:r>
             <a:r>
-              <a:rPr sz="1800" b="0" i="0">
+              <a:rPr sz="2400" b="0" i="0">
                 <a:solidFill>
                   <a:srgbClr val="2A2929"/>
                 </a:solidFill>
@@ -3748,7 +3748,7 @@
               </a:spcAft>
             </a:pPr>
             <a:r>
-              <a:rPr sz="1800" b="1" i="0">
+              <a:rPr sz="2400" b="1" i="0">
                 <a:solidFill>
                   <a:srgbClr val="27B5CE"/>
                 </a:solidFill>
@@ -3757,7 +3757,7 @@
               <a:t>■  </a:t>
             </a:r>
             <a:r>
-              <a:rPr sz="1800" b="1" i="0">
+              <a:rPr sz="2400" b="1" i="0">
                 <a:solidFill>
                   <a:srgbClr val="27B5CE"/>
                 </a:solidFill>
@@ -3779,7 +3779,7 @@
               </a:spcAft>
             </a:pPr>
             <a:r>
-              <a:rPr sz="1800" b="1" i="0">
+              <a:rPr sz="2400" b="1" i="0">
                 <a:solidFill>
                   <a:srgbClr val="EDAB0C"/>
                 </a:solidFill>
@@ -3788,7 +3788,7 @@
               <a:t>■  </a:t>
             </a:r>
             <a:r>
-              <a:rPr sz="1800" b="0" i="0">
+              <a:rPr sz="2400" b="0" i="0">
                 <a:solidFill>
                   <a:srgbClr val="2A2929"/>
                 </a:solidFill>
@@ -4058,7 +4058,7 @@
           <a:noFill/>
         </p:spPr>
         <p:txBody>
-          <a:bodyPr wrap="square" anchor="t" lIns="0" rIns="0" tIns="0" bIns="0">
+          <a:bodyPr wrap="square" anchor="ctr" lIns="0" rIns="0" tIns="0" bIns="0">
             <a:spAutoFit/>
           </a:bodyPr>
           <a:lstStyle/>
@@ -4075,7 +4075,7 @@
               </a:spcAft>
             </a:pPr>
             <a:r>
-              <a:rPr sz="1800" b="1" i="0">
+              <a:rPr sz="2400" b="1" i="0">
                 <a:solidFill>
                   <a:srgbClr val="EDAB0C"/>
                 </a:solidFill>
@@ -4084,7 +4084,7 @@
               <a:t>■  </a:t>
             </a:r>
             <a:r>
-              <a:rPr sz="1800" b="0" i="0">
+              <a:rPr sz="2400" b="0" i="0">
                 <a:solidFill>
                   <a:srgbClr val="2A2929"/>
                 </a:solidFill>
@@ -4106,7 +4106,7 @@
               </a:spcAft>
             </a:pPr>
             <a:r>
-              <a:rPr sz="1800" b="1" i="0">
+              <a:rPr sz="2400" b="1" i="0">
                 <a:solidFill>
                   <a:srgbClr val="EDAB0C"/>
                 </a:solidFill>
@@ -4115,7 +4115,7 @@
               <a:t>■  </a:t>
             </a:r>
             <a:r>
-              <a:rPr sz="1800" b="0" i="0">
+              <a:rPr sz="2400" b="0" i="0">
                 <a:solidFill>
                   <a:srgbClr val="2A2929"/>
                 </a:solidFill>
@@ -4137,7 +4137,7 @@
               </a:spcAft>
             </a:pPr>
             <a:r>
-              <a:rPr sz="1800" b="1" i="0">
+              <a:rPr sz="2400" b="1" i="0">
                 <a:solidFill>
                   <a:srgbClr val="27B5CE"/>
                 </a:solidFill>
@@ -4146,7 +4146,7 @@
               <a:t>■  </a:t>
             </a:r>
             <a:r>
-              <a:rPr sz="1800" b="1" i="0">
+              <a:rPr sz="2400" b="1" i="0">
                 <a:solidFill>
                   <a:srgbClr val="27B5CE"/>
                 </a:solidFill>
@@ -4168,7 +4168,7 @@
               </a:spcAft>
             </a:pPr>
             <a:r>
-              <a:rPr sz="1800" b="1" i="0">
+              <a:rPr sz="2400" b="1" i="0">
                 <a:solidFill>
                   <a:srgbClr val="EDAB0C"/>
                 </a:solidFill>
@@ -4177,7 +4177,7 @@
               <a:t>■  </a:t>
             </a:r>
             <a:r>
-              <a:rPr sz="1800" b="0" i="0">
+              <a:rPr sz="2400" b="0" i="0">
                 <a:solidFill>
                   <a:srgbClr val="2A2929"/>
                 </a:solidFill>
@@ -6003,7 +6003,7 @@
           <a:noFill/>
         </p:spPr>
         <p:txBody>
-          <a:bodyPr wrap="square" anchor="t" lIns="0" rIns="0" tIns="0" bIns="0">
+          <a:bodyPr wrap="square" anchor="ctr" lIns="0" rIns="0" tIns="0" bIns="0">
             <a:spAutoFit/>
           </a:bodyPr>
           <a:lstStyle/>
@@ -6020,7 +6020,7 @@
               </a:spcAft>
             </a:pPr>
             <a:r>
-              <a:rPr sz="1800" b="1" i="0">
+              <a:rPr sz="2400" b="1" i="0">
                 <a:solidFill>
                   <a:srgbClr val="EDAB0C"/>
                 </a:solidFill>
@@ -6029,7 +6029,7 @@
               <a:t>■  </a:t>
             </a:r>
             <a:r>
-              <a:rPr sz="1800" b="0" i="0">
+              <a:rPr sz="2400" b="0" i="0">
                 <a:solidFill>
                   <a:srgbClr val="2A2929"/>
                 </a:solidFill>
@@ -6051,7 +6051,7 @@
               </a:spcAft>
             </a:pPr>
             <a:r>
-              <a:rPr sz="1800" b="1" i="0">
+              <a:rPr sz="2400" b="1" i="0">
                 <a:solidFill>
                   <a:srgbClr val="205F61"/>
                 </a:solidFill>
@@ -6060,7 +6060,7 @@
               <a:t>■  </a:t>
             </a:r>
             <a:r>
-              <a:rPr sz="1800" b="1" i="0">
+              <a:rPr sz="2400" b="1" i="0">
                 <a:solidFill>
                   <a:srgbClr val="205F61"/>
                 </a:solidFill>
@@ -6082,7 +6082,7 @@
               </a:spcAft>
             </a:pPr>
             <a:r>
-              <a:rPr sz="1800" b="1" i="0">
+              <a:rPr sz="2400" b="1" i="0">
                 <a:solidFill>
                   <a:srgbClr val="EDAB0C"/>
                 </a:solidFill>
@@ -6091,7 +6091,7 @@
               <a:t>■  </a:t>
             </a:r>
             <a:r>
-              <a:rPr sz="1800" b="0" i="0">
+              <a:rPr sz="2400" b="0" i="0">
                 <a:solidFill>
                   <a:srgbClr val="2A2929"/>
                 </a:solidFill>
@@ -6361,7 +6361,7 @@
           <a:noFill/>
         </p:spPr>
         <p:txBody>
-          <a:bodyPr wrap="square" anchor="t" lIns="0" rIns="0" tIns="0" bIns="0">
+          <a:bodyPr wrap="square" anchor="ctr" lIns="0" rIns="0" tIns="0" bIns="0">
             <a:spAutoFit/>
           </a:bodyPr>
           <a:lstStyle/>
@@ -6378,7 +6378,7 @@
               </a:spcAft>
             </a:pPr>
             <a:r>
-              <a:rPr sz="1800" b="1" i="0">
+              <a:rPr sz="2400" b="1" i="0">
                 <a:solidFill>
                   <a:srgbClr val="EDAB0C"/>
                 </a:solidFill>
@@ -6387,7 +6387,7 @@
               <a:t>■  </a:t>
             </a:r>
             <a:r>
-              <a:rPr sz="1800" b="0" i="0">
+              <a:rPr sz="2400" b="0" i="0">
                 <a:solidFill>
                   <a:srgbClr val="2A2929"/>
                 </a:solidFill>
@@ -6409,7 +6409,7 @@
               </a:spcAft>
             </a:pPr>
             <a:r>
-              <a:rPr sz="1800" b="1" i="0">
+              <a:rPr sz="2400" b="1" i="0">
                 <a:solidFill>
                   <a:srgbClr val="EDAB0C"/>
                 </a:solidFill>
@@ -6418,7 +6418,7 @@
               <a:t>■  </a:t>
             </a:r>
             <a:r>
-              <a:rPr sz="1800" b="0" i="0">
+              <a:rPr sz="2400" b="0" i="0">
                 <a:solidFill>
                   <a:srgbClr val="2A2929"/>
                 </a:solidFill>
@@ -6440,7 +6440,7 @@
               </a:spcAft>
             </a:pPr>
             <a:r>
-              <a:rPr sz="1800" b="1" i="0">
+              <a:rPr sz="2400" b="1" i="0">
                 <a:solidFill>
                   <a:srgbClr val="EDAB0C"/>
                 </a:solidFill>
@@ -6449,7 +6449,7 @@
               <a:t>■  </a:t>
             </a:r>
             <a:r>
-              <a:rPr sz="1800" b="0" i="0">
+              <a:rPr sz="2400" b="0" i="0">
                 <a:solidFill>
                   <a:srgbClr val="2A2929"/>
                 </a:solidFill>
@@ -6471,7 +6471,7 @@
               </a:spcAft>
             </a:pPr>
             <a:r>
-              <a:rPr sz="1800" b="1" i="0">
+              <a:rPr sz="2400" b="1" i="0">
                 <a:solidFill>
                   <a:srgbClr val="205F61"/>
                 </a:solidFill>
@@ -6480,7 +6480,7 @@
               <a:t>■  </a:t>
             </a:r>
             <a:r>
-              <a:rPr sz="1800" b="1" i="0">
+              <a:rPr sz="2400" b="1" i="0">
                 <a:solidFill>
                   <a:srgbClr val="205F61"/>
                 </a:solidFill>
@@ -7461,7 +7461,7 @@
           <a:noFill/>
         </p:spPr>
         <p:txBody>
-          <a:bodyPr wrap="square" anchor="t" lIns="0" rIns="0" tIns="0" bIns="0">
+          <a:bodyPr wrap="square" anchor="ctr" lIns="0" rIns="0" tIns="0" bIns="0">
             <a:spAutoFit/>
           </a:bodyPr>
           <a:lstStyle/>
@@ -7478,7 +7478,7 @@
               </a:spcAft>
             </a:pPr>
             <a:r>
-              <a:rPr sz="1800" b="1" i="0">
+              <a:rPr sz="2400" b="1" i="0">
                 <a:solidFill>
                   <a:srgbClr val="EDAB0C"/>
                 </a:solidFill>
@@ -7487,7 +7487,7 @@
               <a:t>■  </a:t>
             </a:r>
             <a:r>
-              <a:rPr sz="1800" b="0" i="0">
+              <a:rPr sz="2400" b="0" i="0">
                 <a:solidFill>
                   <a:srgbClr val="2A2929"/>
                 </a:solidFill>
@@ -7509,7 +7509,7 @@
               </a:spcAft>
             </a:pPr>
             <a:r>
-              <a:rPr sz="1800" b="1" i="0">
+              <a:rPr sz="2400" b="1" i="0">
                 <a:solidFill>
                   <a:srgbClr val="EDAB0C"/>
                 </a:solidFill>
@@ -7518,7 +7518,7 @@
               <a:t>■  </a:t>
             </a:r>
             <a:r>
-              <a:rPr sz="1800" b="0" i="0">
+              <a:rPr sz="2400" b="0" i="0">
                 <a:solidFill>
                   <a:srgbClr val="2A2929"/>
                 </a:solidFill>
@@ -7540,7 +7540,7 @@
               </a:spcAft>
             </a:pPr>
             <a:r>
-              <a:rPr sz="1800" b="1" i="0">
+              <a:rPr sz="2400" b="1" i="0">
                 <a:solidFill>
                   <a:srgbClr val="205F61"/>
                 </a:solidFill>
@@ -7549,7 +7549,7 @@
               <a:t>■  </a:t>
             </a:r>
             <a:r>
-              <a:rPr sz="1800" b="1" i="0">
+              <a:rPr sz="2400" b="1" i="0">
                 <a:solidFill>
                   <a:srgbClr val="205F61"/>
                 </a:solidFill>
@@ -7571,7 +7571,7 @@
               </a:spcAft>
             </a:pPr>
             <a:r>
-              <a:rPr sz="1800" b="1" i="0">
+              <a:rPr sz="2400" b="1" i="0">
                 <a:solidFill>
                   <a:srgbClr val="EDAB0C"/>
                 </a:solidFill>
@@ -7580,7 +7580,7 @@
               <a:t>■  </a:t>
             </a:r>
             <a:r>
-              <a:rPr sz="1800" b="0" i="0">
+              <a:rPr sz="2400" b="0" i="0">
                 <a:solidFill>
                   <a:srgbClr val="2A2929"/>
                 </a:solidFill>
@@ -7850,7 +7850,7 @@
           <a:noFill/>
         </p:spPr>
         <p:txBody>
-          <a:bodyPr wrap="square" anchor="t" lIns="0" rIns="0" tIns="0" bIns="0">
+          <a:bodyPr wrap="square" anchor="ctr" lIns="0" rIns="0" tIns="0" bIns="0">
             <a:spAutoFit/>
           </a:bodyPr>
           <a:lstStyle/>
@@ -7867,7 +7867,7 @@
               </a:spcAft>
             </a:pPr>
             <a:r>
-              <a:rPr sz="1800" b="1" i="0">
+              <a:rPr sz="2400" b="1" i="0">
                 <a:solidFill>
                   <a:srgbClr val="EDAB0C"/>
                 </a:solidFill>
@@ -7876,7 +7876,7 @@
               <a:t>■  </a:t>
             </a:r>
             <a:r>
-              <a:rPr sz="1800" b="0" i="0">
+              <a:rPr sz="2400" b="0" i="0">
                 <a:solidFill>
                   <a:srgbClr val="2A2929"/>
                 </a:solidFill>
@@ -7898,7 +7898,7 @@
               </a:spcAft>
             </a:pPr>
             <a:r>
-              <a:rPr sz="1800" b="1" i="0">
+              <a:rPr sz="2400" b="1" i="0">
                 <a:solidFill>
                   <a:srgbClr val="92268F"/>
                 </a:solidFill>
@@ -7907,7 +7907,7 @@
               <a:t>■  </a:t>
             </a:r>
             <a:r>
-              <a:rPr sz="1800" b="1" i="0">
+              <a:rPr sz="2400" b="1" i="0">
                 <a:solidFill>
                   <a:srgbClr val="92268F"/>
                 </a:solidFill>
@@ -7929,7 +7929,7 @@
               </a:spcAft>
             </a:pPr>
             <a:r>
-              <a:rPr sz="1800" b="1" i="0">
+              <a:rPr sz="2400" b="1" i="0">
                 <a:solidFill>
                   <a:srgbClr val="EDAB0C"/>
                 </a:solidFill>
@@ -7938,7 +7938,7 @@
               <a:t>■  </a:t>
             </a:r>
             <a:r>
-              <a:rPr sz="1800" b="0" i="0">
+              <a:rPr sz="2400" b="0" i="0">
                 <a:solidFill>
                   <a:srgbClr val="2A2929"/>
                 </a:solidFill>
@@ -7960,7 +7960,7 @@
               </a:spcAft>
             </a:pPr>
             <a:r>
-              <a:rPr sz="1800" b="1" i="0">
+              <a:rPr sz="2400" b="1" i="0">
                 <a:solidFill>
                   <a:srgbClr val="EDAB0C"/>
                 </a:solidFill>
@@ -7969,7 +7969,7 @@
               <a:t>■  </a:t>
             </a:r>
             <a:r>
-              <a:rPr sz="1800" b="0" i="0">
+              <a:rPr sz="2400" b="0" i="0">
                 <a:solidFill>
                   <a:srgbClr val="2A2929"/>
                 </a:solidFill>
@@ -10824,7 +10824,7 @@
           <a:noFill/>
         </p:spPr>
         <p:txBody>
-          <a:bodyPr wrap="square" anchor="t" lIns="0" rIns="0" tIns="0" bIns="0">
+          <a:bodyPr wrap="square" anchor="ctr" lIns="0" rIns="0" tIns="0" bIns="0">
             <a:spAutoFit/>
           </a:bodyPr>
           <a:lstStyle/>
@@ -10841,7 +10841,7 @@
               </a:spcAft>
             </a:pPr>
             <a:r>
-              <a:rPr sz="1800" b="1" i="0">
+              <a:rPr sz="2400" b="1" i="0">
                 <a:solidFill>
                   <a:srgbClr val="EDAB0C"/>
                 </a:solidFill>
@@ -10850,7 +10850,7 @@
               <a:t>■  </a:t>
             </a:r>
             <a:r>
-              <a:rPr sz="1800" b="0" i="0">
+              <a:rPr sz="2400" b="0" i="0">
                 <a:solidFill>
                   <a:srgbClr val="2A2929"/>
                 </a:solidFill>
@@ -10872,7 +10872,7 @@
               </a:spcAft>
             </a:pPr>
             <a:r>
-              <a:rPr sz="1800" b="1" i="0">
+              <a:rPr sz="2400" b="1" i="0">
                 <a:solidFill>
                   <a:srgbClr val="EDAB0C"/>
                 </a:solidFill>
@@ -10881,7 +10881,7 @@
               <a:t>■  </a:t>
             </a:r>
             <a:r>
-              <a:rPr sz="1800" b="0" i="0">
+              <a:rPr sz="2400" b="0" i="0">
                 <a:solidFill>
                   <a:srgbClr val="2A2929"/>
                 </a:solidFill>
@@ -10903,7 +10903,7 @@
               </a:spcAft>
             </a:pPr>
             <a:r>
-              <a:rPr sz="1800" b="1" i="0">
+              <a:rPr sz="2400" b="1" i="0">
                 <a:solidFill>
                   <a:srgbClr val="EDAB0C"/>
                 </a:solidFill>
@@ -10912,7 +10912,7 @@
               <a:t>■  </a:t>
             </a:r>
             <a:r>
-              <a:rPr sz="1800" b="0" i="0">
+              <a:rPr sz="2400" b="0" i="0">
                 <a:solidFill>
                   <a:srgbClr val="2A2929"/>
                 </a:solidFill>
@@ -10934,7 +10934,7 @@
               </a:spcAft>
             </a:pPr>
             <a:r>
-              <a:rPr sz="1800" b="1" i="0">
+              <a:rPr sz="2400" b="1" i="0">
                 <a:solidFill>
                   <a:srgbClr val="92268F"/>
                 </a:solidFill>
@@ -10943,7 +10943,7 @@
               <a:t>■  </a:t>
             </a:r>
             <a:r>
-              <a:rPr sz="1800" b="1" i="0">
+              <a:rPr sz="2400" b="1" i="0">
                 <a:solidFill>
                   <a:srgbClr val="92268F"/>
                 </a:solidFill>

--- a/S1-CL1-Cloud-Design-Build/delivery/topic_09/Topic_09_Slides.pptx
+++ b/S1-CL1-Cloud-Design-Build/delivery/topic_09/Topic_09_Slides.pptx
@@ -7,27 +7,27 @@
   <p:sldIdLst>
     <p:sldId id="256" r:id="rId7"/>
     <p:sldId id="257" r:id="rId8"/>
-    <p:sldId id="258" r:id="rId9"/>
-    <p:sldId id="259" r:id="rId10"/>
-    <p:sldId id="260" r:id="rId11"/>
-    <p:sldId id="261" r:id="rId12"/>
-    <p:sldId id="262" r:id="rId13"/>
-    <p:sldId id="263" r:id="rId14"/>
-    <p:sldId id="264" r:id="rId15"/>
-    <p:sldId id="265" r:id="rId16"/>
-    <p:sldId id="266" r:id="rId17"/>
-    <p:sldId id="267" r:id="rId18"/>
-    <p:sldId id="268" r:id="rId19"/>
-    <p:sldId id="269" r:id="rId20"/>
-    <p:sldId id="270" r:id="rId21"/>
-    <p:sldId id="271" r:id="rId22"/>
-    <p:sldId id="272" r:id="rId23"/>
-    <p:sldId id="273" r:id="rId24"/>
-    <p:sldId id="274" r:id="rId25"/>
-    <p:sldId id="275" r:id="rId26"/>
-    <p:sldId id="276" r:id="rId27"/>
-    <p:sldId id="277" r:id="rId28"/>
-    <p:sldId id="278" r:id="rId29"/>
+    <p:sldId id="258" r:id="rId10"/>
+    <p:sldId id="259" r:id="rId11"/>
+    <p:sldId id="260" r:id="rId12"/>
+    <p:sldId id="261" r:id="rId13"/>
+    <p:sldId id="262" r:id="rId14"/>
+    <p:sldId id="263" r:id="rId15"/>
+    <p:sldId id="264" r:id="rId16"/>
+    <p:sldId id="265" r:id="rId17"/>
+    <p:sldId id="266" r:id="rId18"/>
+    <p:sldId id="267" r:id="rId19"/>
+    <p:sldId id="268" r:id="rId20"/>
+    <p:sldId id="269" r:id="rId21"/>
+    <p:sldId id="270" r:id="rId22"/>
+    <p:sldId id="271" r:id="rId23"/>
+    <p:sldId id="272" r:id="rId24"/>
+    <p:sldId id="273" r:id="rId25"/>
+    <p:sldId id="274" r:id="rId26"/>
+    <p:sldId id="275" r:id="rId27"/>
+    <p:sldId id="276" r:id="rId28"/>
+    <p:sldId id="277" r:id="rId29"/>
+    <p:sldId id="278" r:id="rId30"/>
   </p:sldIdLst>
   <p:sldSz cx="12191695" cy="6858000" type="screen4x3"/>
   <p:notesSz cx="6858000" cy="9144000"/>
@@ -127,6 +127,2046 @@
     </a:lvl9pPr>
   </p:defaultTextStyle>
 </p:presentation>
+</file>
+
+<file path=ppt/notesMasters/notesMaster1.xml><?xml version="1.0" encoding="utf-8"?>
+<p:notesMaster xmlns:a="http://schemas.openxmlformats.org/drawingml/2006/main" xmlns:p="http://schemas.openxmlformats.org/presentationml/2006/main" xmlns:r="http://schemas.openxmlformats.org/officeDocument/2006/relationships">
+  <p:cSld>
+    <p:bg>
+      <p:bgRef idx="1001">
+        <a:schemeClr val="bg1"/>
+      </p:bgRef>
+    </p:bg>
+    <p:spTree>
+      <p:nvGrpSpPr>
+        <p:cNvPr id="1" name=""/>
+        <p:cNvGrpSpPr/>
+        <p:nvPr/>
+      </p:nvGrpSpPr>
+      <p:grpSpPr>
+        <a:xfrm>
+          <a:off x="0" y="0"/>
+          <a:ext cx="0" cy="0"/>
+          <a:chOff x="0" y="0"/>
+          <a:chExt cx="0" cy="0"/>
+        </a:xfrm>
+      </p:grpSpPr>
+      <p:sp>
+        <p:nvSpPr>
+          <p:cNvPr id="2" name="Header Placeholder 1"/>
+          <p:cNvSpPr>
+            <a:spLocks noGrp="1"/>
+          </p:cNvSpPr>
+          <p:nvPr>
+            <p:ph type="hdr" sz="quarter"/>
+          </p:nvPr>
+        </p:nvSpPr>
+        <p:spPr>
+          <a:xfrm>
+            <a:off x="0" y="0"/>
+            <a:ext cx="2971800" cy="457200"/>
+          </a:xfrm>
+          <a:prstGeom prst="rect">
+            <a:avLst/>
+          </a:prstGeom>
+        </p:spPr>
+        <p:txBody>
+          <a:bodyPr vert="horz" lIns="91440" tIns="45720" rIns="91440" bIns="45720" rtlCol="0"/>
+          <a:lstStyle>
+            <a:lvl1pPr algn="l">
+              <a:defRPr sz="1200"/>
+            </a:lvl1pPr>
+          </a:lstStyle>
+          <a:p>
+            <a:endParaRPr lang="en-US"/>
+          </a:p>
+        </p:txBody>
+      </p:sp>
+      <p:sp>
+        <p:nvSpPr>
+          <p:cNvPr id="3" name="Date Placeholder 2"/>
+          <p:cNvSpPr>
+            <a:spLocks noGrp="1"/>
+          </p:cNvSpPr>
+          <p:nvPr>
+            <p:ph type="dt" idx="1"/>
+          </p:nvPr>
+        </p:nvSpPr>
+        <p:spPr>
+          <a:xfrm>
+            <a:off x="3884613" y="0"/>
+            <a:ext cx="2971800" cy="457200"/>
+          </a:xfrm>
+          <a:prstGeom prst="rect">
+            <a:avLst/>
+          </a:prstGeom>
+        </p:spPr>
+        <p:txBody>
+          <a:bodyPr vert="horz" lIns="91440" tIns="45720" rIns="91440" bIns="45720" rtlCol="0"/>
+          <a:lstStyle>
+            <a:lvl1pPr algn="r">
+              <a:defRPr sz="1200"/>
+            </a:lvl1pPr>
+          </a:lstStyle>
+          <a:p>
+            <a:fld id="{0F89C1C7-3DCD-1040-A9CF-14679D8B5DDD}" type="datetimeFigureOut">
+              <a:rPr lang="en-US" smtClean="0"/>
+              <a:t>10/17/16</a:t>
+            </a:fld>
+            <a:endParaRPr lang="en-US"/>
+          </a:p>
+        </p:txBody>
+      </p:sp>
+      <p:sp>
+        <p:nvSpPr>
+          <p:cNvPr id="4" name="Slide Image Placeholder 3"/>
+          <p:cNvSpPr>
+            <a:spLocks noGrp="1" noRot="1" noChangeAspect="1"/>
+          </p:cNvSpPr>
+          <p:nvPr>
+            <p:ph type="sldImg" idx="2"/>
+          </p:nvPr>
+        </p:nvSpPr>
+        <p:spPr>
+          <a:xfrm>
+            <a:off x="1143000" y="685800"/>
+            <a:ext cx="4572000" cy="3429000"/>
+          </a:xfrm>
+          <a:prstGeom prst="rect">
+            <a:avLst/>
+          </a:prstGeom>
+          <a:noFill/>
+          <a:ln w="12700">
+            <a:solidFill>
+              <a:prstClr val="black"/>
+            </a:solidFill>
+          </a:ln>
+        </p:spPr>
+        <p:txBody>
+          <a:bodyPr vert="horz" lIns="91440" tIns="45720" rIns="91440" bIns="45720" rtlCol="0" anchor="ctr"/>
+          <a:lstStyle/>
+          <a:p>
+            <a:endParaRPr lang="en-US"/>
+          </a:p>
+        </p:txBody>
+      </p:sp>
+      <p:sp>
+        <p:nvSpPr>
+          <p:cNvPr id="5" name="Notes Placeholder 4"/>
+          <p:cNvSpPr>
+            <a:spLocks noGrp="1"/>
+          </p:cNvSpPr>
+          <p:nvPr>
+            <p:ph type="body" sz="quarter" idx="3"/>
+          </p:nvPr>
+        </p:nvSpPr>
+        <p:spPr>
+          <a:xfrm>
+            <a:off x="685800" y="4343400"/>
+            <a:ext cx="5486400" cy="4114800"/>
+          </a:xfrm>
+          <a:prstGeom prst="rect">
+            <a:avLst/>
+          </a:prstGeom>
+        </p:spPr>
+        <p:txBody>
+          <a:bodyPr vert="horz" lIns="91440" tIns="45720" rIns="91440" bIns="45720" rtlCol="0"/>
+          <a:lstStyle/>
+          <a:p>
+            <a:pPr lvl="0"/>
+            <a:r>
+              <a:rPr lang="en-US" smtClean="0"/>
+              <a:t>Click to edit Master text styles</a:t>
+            </a:r>
+          </a:p>
+          <a:p>
+            <a:pPr lvl="1"/>
+            <a:r>
+              <a:rPr lang="en-US" smtClean="0"/>
+              <a:t>Second level</a:t>
+            </a:r>
+          </a:p>
+          <a:p>
+            <a:pPr lvl="2"/>
+            <a:r>
+              <a:rPr lang="en-US" smtClean="0"/>
+              <a:t>Third level</a:t>
+            </a:r>
+          </a:p>
+          <a:p>
+            <a:pPr lvl="3"/>
+            <a:r>
+              <a:rPr lang="en-US" smtClean="0"/>
+              <a:t>Fourth level</a:t>
+            </a:r>
+          </a:p>
+          <a:p>
+            <a:pPr lvl="4"/>
+            <a:r>
+              <a:rPr lang="en-US" smtClean="0"/>
+              <a:t>Fifth level</a:t>
+            </a:r>
+            <a:endParaRPr lang="en-US"/>
+          </a:p>
+        </p:txBody>
+      </p:sp>
+      <p:sp>
+        <p:nvSpPr>
+          <p:cNvPr id="6" name="Footer Placeholder 5"/>
+          <p:cNvSpPr>
+            <a:spLocks noGrp="1"/>
+          </p:cNvSpPr>
+          <p:nvPr>
+            <p:ph type="ftr" sz="quarter" idx="4"/>
+          </p:nvPr>
+        </p:nvSpPr>
+        <p:spPr>
+          <a:xfrm>
+            <a:off x="0" y="8685213"/>
+            <a:ext cx="2971800" cy="457200"/>
+          </a:xfrm>
+          <a:prstGeom prst="rect">
+            <a:avLst/>
+          </a:prstGeom>
+        </p:spPr>
+        <p:txBody>
+          <a:bodyPr vert="horz" lIns="91440" tIns="45720" rIns="91440" bIns="45720" rtlCol="0" anchor="b"/>
+          <a:lstStyle>
+            <a:lvl1pPr algn="l">
+              <a:defRPr sz="1200"/>
+            </a:lvl1pPr>
+          </a:lstStyle>
+          <a:p>
+            <a:endParaRPr lang="en-US"/>
+          </a:p>
+        </p:txBody>
+      </p:sp>
+      <p:sp>
+        <p:nvSpPr>
+          <p:cNvPr id="7" name="Slide Number Placeholder 6"/>
+          <p:cNvSpPr>
+            <a:spLocks noGrp="1"/>
+          </p:cNvSpPr>
+          <p:nvPr>
+            <p:ph type="sldNum" sz="quarter" idx="5"/>
+          </p:nvPr>
+        </p:nvSpPr>
+        <p:spPr>
+          <a:xfrm>
+            <a:off x="3884613" y="8685213"/>
+            <a:ext cx="2971800" cy="457200"/>
+          </a:xfrm>
+          <a:prstGeom prst="rect">
+            <a:avLst/>
+          </a:prstGeom>
+        </p:spPr>
+        <p:txBody>
+          <a:bodyPr vert="horz" lIns="91440" tIns="45720" rIns="91440" bIns="45720" rtlCol="0" anchor="b"/>
+          <a:lstStyle>
+            <a:lvl1pPr algn="r">
+              <a:defRPr sz="1200"/>
+            </a:lvl1pPr>
+          </a:lstStyle>
+          <a:p>
+            <a:fld id="{BB5E49A5-4136-284D-997B-48E1D791AD67}" type="slidenum">
+              <a:rPr lang="en-US" smtClean="0"/>
+              <a:t>‹#›</a:t>
+            </a:fld>
+            <a:endParaRPr lang="en-US"/>
+          </a:p>
+        </p:txBody>
+      </p:sp>
+    </p:spTree>
+    <p:extLst>
+      <p:ext uri="{BB962C8B-B14F-4D97-AF65-F5344CB8AC3E}">
+        <p14:creationId xmlns:p14="http://schemas.microsoft.com/office/powerpoint/2010/main" val="2623252185"/>
+      </p:ext>
+    </p:extLst>
+  </p:cSld>
+  <p:clrMap bg1="lt1" tx1="dk1" bg2="lt2" tx2="dk2" accent1="accent1" accent2="accent2" accent3="accent3" accent4="accent4" accent5="accent5" accent6="accent6" hlink="hlink" folHlink="folHlink"/>
+  <p:notesStyle>
+    <a:lvl1pPr marL="0" algn="l" defTabSz="457200" rtl="0" eaLnBrk="1" latinLnBrk="0" hangingPunct="1">
+      <a:defRPr sz="1200" kern="1200">
+        <a:solidFill>
+          <a:schemeClr val="tx1"/>
+        </a:solidFill>
+        <a:latin typeface="+mn-lt"/>
+        <a:ea typeface="+mn-ea"/>
+        <a:cs typeface="+mn-cs"/>
+      </a:defRPr>
+    </a:lvl1pPr>
+    <a:lvl2pPr marL="457200" algn="l" defTabSz="457200" rtl="0" eaLnBrk="1" latinLnBrk="0" hangingPunct="1">
+      <a:defRPr sz="1200" kern="1200">
+        <a:solidFill>
+          <a:schemeClr val="tx1"/>
+        </a:solidFill>
+        <a:latin typeface="+mn-lt"/>
+        <a:ea typeface="+mn-ea"/>
+        <a:cs typeface="+mn-cs"/>
+      </a:defRPr>
+    </a:lvl2pPr>
+    <a:lvl3pPr marL="914400" algn="l" defTabSz="457200" rtl="0" eaLnBrk="1" latinLnBrk="0" hangingPunct="1">
+      <a:defRPr sz="1200" kern="1200">
+        <a:solidFill>
+          <a:schemeClr val="tx1"/>
+        </a:solidFill>
+        <a:latin typeface="+mn-lt"/>
+        <a:ea typeface="+mn-ea"/>
+        <a:cs typeface="+mn-cs"/>
+      </a:defRPr>
+    </a:lvl3pPr>
+    <a:lvl4pPr marL="1371600" algn="l" defTabSz="457200" rtl="0" eaLnBrk="1" latinLnBrk="0" hangingPunct="1">
+      <a:defRPr sz="1200" kern="1200">
+        <a:solidFill>
+          <a:schemeClr val="tx1"/>
+        </a:solidFill>
+        <a:latin typeface="+mn-lt"/>
+        <a:ea typeface="+mn-ea"/>
+        <a:cs typeface="+mn-cs"/>
+      </a:defRPr>
+    </a:lvl4pPr>
+    <a:lvl5pPr marL="1828800" algn="l" defTabSz="457200" rtl="0" eaLnBrk="1" latinLnBrk="0" hangingPunct="1">
+      <a:defRPr sz="1200" kern="1200">
+        <a:solidFill>
+          <a:schemeClr val="tx1"/>
+        </a:solidFill>
+        <a:latin typeface="+mn-lt"/>
+        <a:ea typeface="+mn-ea"/>
+        <a:cs typeface="+mn-cs"/>
+      </a:defRPr>
+    </a:lvl5pPr>
+    <a:lvl6pPr marL="2286000" algn="l" defTabSz="457200" rtl="0" eaLnBrk="1" latinLnBrk="0" hangingPunct="1">
+      <a:defRPr sz="1200" kern="1200">
+        <a:solidFill>
+          <a:schemeClr val="tx1"/>
+        </a:solidFill>
+        <a:latin typeface="+mn-lt"/>
+        <a:ea typeface="+mn-ea"/>
+        <a:cs typeface="+mn-cs"/>
+      </a:defRPr>
+    </a:lvl6pPr>
+    <a:lvl7pPr marL="2743200" algn="l" defTabSz="457200" rtl="0" eaLnBrk="1" latinLnBrk="0" hangingPunct="1">
+      <a:defRPr sz="1200" kern="1200">
+        <a:solidFill>
+          <a:schemeClr val="tx1"/>
+        </a:solidFill>
+        <a:latin typeface="+mn-lt"/>
+        <a:ea typeface="+mn-ea"/>
+        <a:cs typeface="+mn-cs"/>
+      </a:defRPr>
+    </a:lvl7pPr>
+    <a:lvl8pPr marL="3200400" algn="l" defTabSz="457200" rtl="0" eaLnBrk="1" latinLnBrk="0" hangingPunct="1">
+      <a:defRPr sz="1200" kern="1200">
+        <a:solidFill>
+          <a:schemeClr val="tx1"/>
+        </a:solidFill>
+        <a:latin typeface="+mn-lt"/>
+        <a:ea typeface="+mn-ea"/>
+        <a:cs typeface="+mn-cs"/>
+      </a:defRPr>
+    </a:lvl8pPr>
+    <a:lvl9pPr marL="3657600" algn="l" defTabSz="457200" rtl="0" eaLnBrk="1" latinLnBrk="0" hangingPunct="1">
+      <a:defRPr sz="1200" kern="1200">
+        <a:solidFill>
+          <a:schemeClr val="tx1"/>
+        </a:solidFill>
+        <a:latin typeface="+mn-lt"/>
+        <a:ea typeface="+mn-ea"/>
+        <a:cs typeface="+mn-cs"/>
+      </a:defRPr>
+    </a:lvl9pPr>
+  </p:notesStyle>
+</p:notesMaster>
+</file>
+
+<file path=ppt/notesSlides/notesSlide1.xml><?xml version="1.0" encoding="utf-8"?>
+<p:notes xmlns:a="http://schemas.openxmlformats.org/drawingml/2006/main" xmlns:p="http://schemas.openxmlformats.org/presentationml/2006/main" xmlns:r="http://schemas.openxmlformats.org/officeDocument/2006/relationships">
+  <p:cSld>
+    <p:spTree>
+      <p:nvGrpSpPr>
+        <p:cNvPr id="1" name=""/>
+        <p:cNvGrpSpPr/>
+        <p:nvPr/>
+      </p:nvGrpSpPr>
+      <p:grpSpPr>
+        <a:xfrm>
+          <a:off x="0" y="0"/>
+          <a:ext cx="0" cy="0"/>
+          <a:chOff x="0" y="0"/>
+          <a:chExt cx="0" cy="0"/>
+        </a:xfrm>
+      </p:grpSpPr>
+      <p:sp>
+        <p:nvSpPr>
+          <p:cNvPr id="2" name="Slide Image Placeholder 1"/>
+          <p:cNvSpPr>
+            <a:spLocks noGrp="1"/>
+          </p:cNvSpPr>
+          <p:nvPr>
+            <p:ph type="sldImg" idx="2"/>
+          </p:nvPr>
+        </p:nvSpPr>
+        <p:spPr/>
+      </p:sp>
+      <p:sp>
+        <p:nvSpPr>
+          <p:cNvPr id="3" name="Notes Placeholder 2"/>
+          <p:cNvSpPr>
+            <a:spLocks noGrp="1"/>
+          </p:cNvSpPr>
+          <p:nvPr>
+            <p:ph type="body" idx="3" sz="quarter"/>
+          </p:nvPr>
+        </p:nvSpPr>
+        <p:spPr/>
+        <p:txBody>
+          <a:bodyPr/>
+          <a:lstStyle/>
+          <a:p>
+            <a:r>
+              <a:t>Frame this as the map for the whole Topic — set the pivot, don't teach content yet.</a:t>
+            </a:r>
+          </a:p>
+          <a:p>
+            <a:r>
+              <a:t>• Where this sits: Topics 6–8 BUILT the workload (foundation, network, compute, data). Today is</a:t>
+            </a:r>
+          </a:p>
+          <a:p>
+            <a:r>
+              <a:t>  not more building — it's making that build operable and defensible.</a:t>
+            </a:r>
+          </a:p>
+          <a:p>
+            <a:r>
+              <a:t>• Read the three verbs off the accent-bold line: monitor it, validate it, justify the open</a:t>
+            </a:r>
+          </a:p>
+          <a:p>
+            <a:r>
+              <a:t>  decisions. Each maps to a Section today (C1 monitoring, C2 validation, C3 justification).</a:t>
+            </a:r>
+          </a:p>
+          <a:p>
+            <a:r>
+              <a:t>• The stakes line (third bullet): these three things are exactly what the Deployment Report is</a:t>
+            </a:r>
+          </a:p>
+          <a:p>
+            <a:r>
+              <a:t>  MARKED on — this isn't housekeeping, it's the assessed judgement.</a:t>
+            </a:r>
+          </a:p>
+          <a:p>
+            <a:r>
+              <a:t>• Point forward: Topic 10 turns today's evidence and justifications into the report itself.</a:t>
+            </a:r>
+          </a:p>
+          <a:p>
+            <a:r>
+              <a:t>Misconception to pre-empt: "the build is done, so the hard part's over." No — a build nobody can</a:t>
+            </a:r>
+          </a:p>
+          <a:p>
+            <a:r>
+              <a:t>monitor or defend earns few marks; the judgement work starts now.</a:t>
+            </a:r>
+          </a:p>
+          <a:p>
+            <a:r>
+              <a:t>Question to pose: "You've built it and it runs — why isn't that enough to hand to the client?"</a:t>
+            </a:r>
+          </a:p>
+          <a:p>
+            <a:r>
+              <a:t>(because you must show it works AND why each choice was right).</a:t>
+            </a:r>
+          </a:p>
+          <a:p>
+            <a:r>
+              <a:t>UoC/AT2 tie: this Topic develops ICTCLD401 (primary) + ICTCLD502 (partial); today's outputs feed</a:t>
+            </a:r>
+          </a:p>
+          <a:p>
+            <a:r>
+              <a:t>AT2 Deployment Report §4.10, §4.13 and §4.16.</a:t>
+            </a:r>
+          </a:p>
+        </p:txBody>
+      </p:sp>
+      <p:sp>
+        <p:nvSpPr>
+          <p:cNvPr id="4" name="Slide Number Placeholder 3"/>
+          <p:cNvSpPr>
+            <a:spLocks noGrp="1"/>
+          </p:cNvSpPr>
+          <p:nvPr>
+            <p:ph type="sldNum" idx="5" sz="quarter"/>
+          </p:nvPr>
+        </p:nvSpPr>
+        <p:spPr/>
+      </p:sp>
+    </p:spTree>
+  </p:cSld>
+  <p:clrMapOvr>
+    <a:masterClrMapping/>
+  </p:clrMapOvr>
+</p:notes>
+</file>
+
+<file path=ppt/notesSlides/notesSlide10.xml><?xml version="1.0" encoding="utf-8"?>
+<p:notes xmlns:a="http://schemas.openxmlformats.org/drawingml/2006/main" xmlns:p="http://schemas.openxmlformats.org/presentationml/2006/main" xmlns:r="http://schemas.openxmlformats.org/officeDocument/2006/relationships">
+  <p:cSld>
+    <p:spTree>
+      <p:nvGrpSpPr>
+        <p:cNvPr id="1" name=""/>
+        <p:cNvGrpSpPr/>
+        <p:nvPr/>
+      </p:nvGrpSpPr>
+      <p:grpSpPr>
+        <a:xfrm>
+          <a:off x="0" y="0"/>
+          <a:ext cx="0" cy="0"/>
+          <a:chOff x="0" y="0"/>
+          <a:chExt cx="0" cy="0"/>
+        </a:xfrm>
+      </p:grpSpPr>
+      <p:sp>
+        <p:nvSpPr>
+          <p:cNvPr id="2" name="Slide Image Placeholder 1"/>
+          <p:cNvSpPr>
+            <a:spLocks noGrp="1"/>
+          </p:cNvSpPr>
+          <p:nvPr>
+            <p:ph type="sldImg" idx="2"/>
+          </p:nvPr>
+        </p:nvSpPr>
+        <p:spPr/>
+      </p:sp>
+      <p:sp>
+        <p:nvSpPr>
+          <p:cNvPr id="3" name="Notes Placeholder 2"/>
+          <p:cNvSpPr>
+            <a:spLocks noGrp="1"/>
+          </p:cNvSpPr>
+          <p:nvPr>
+            <p:ph type="body" idx="3" sz="quarter"/>
+          </p:nvPr>
+        </p:nvSpPr>
+        <p:spPr/>
+        <p:txBody>
+          <a:bodyPr/>
+          <a:lstStyle/>
+          <a:p>
+            <a:r>
+              <a:t>The C3 method slide — give students the repeatable four-step scaffold they'll apply to every</a:t>
+            </a:r>
+          </a:p>
+          <a:p>
+            <a:r>
+              <a:t>decision. Teach it as a template, not prose.</a:t>
+            </a:r>
+          </a:p>
+          <a:p>
+            <a:r>
+              <a:t>• Walk the four steps in order: 1. State the decision (what you chose). 2. The workload FACTS that</a:t>
+            </a:r>
+          </a:p>
+          <a:p>
+            <a:r>
+              <a:t>  bear on it — load, pattern, data sensitivity, residency, cost appetite. 3. WEIGH it —</a:t>
+            </a:r>
+          </a:p>
+          <a:p>
+            <a:r>
+              <a:t>  performance vs cost vs security vs residency. 4. Name the ALTERNATIVE and why you rejected it.</a:t>
+            </a:r>
+          </a:p>
+          <a:p>
+            <a:r>
+              <a:t>• Stress step 4 (accent-bold): the rejected alternative is what most students skip, and it's what</a:t>
+            </a:r>
+          </a:p>
+          <a:p>
+            <a:r>
+              <a:t>  proves the choice was a judgement, not a default.</a:t>
+            </a:r>
+          </a:p>
+          <a:p>
+            <a:r>
+              <a:t>• Tell them: apply this SAME four steps to every open decision — consistency is what makes the</a:t>
+            </a:r>
+          </a:p>
+          <a:p>
+            <a:r>
+              <a:t>  report defensible.</a:t>
+            </a:r>
+          </a:p>
+          <a:p>
+            <a:r>
+              <a:t>Misconception to pre-empt: "step 2 = any facts about the workload." No — only the facts that BEAR</a:t>
+            </a:r>
+          </a:p>
+          <a:p>
+            <a:r>
+              <a:t>on this decision (for an instance type: the user load/pattern, not the residency rule).</a:t>
+            </a:r>
+          </a:p>
+          <a:p>
+            <a:r>
+              <a:t>Question to pose: "Which of the four steps is the one you'll be tempted to drop — and why is it the</a:t>
+            </a:r>
+          </a:p>
+          <a:p>
+            <a:r>
+              <a:t>one that earns the marks?" (step 4, the rejected alternative).</a:t>
+            </a:r>
+          </a:p>
+          <a:p>
+            <a:r>
+              <a:t>UoC/AT2 tie: PC 1.1 (compare) · PC 1.3 (select) · PC 1.8 (define workload); the method operationalises</a:t>
+            </a:r>
+          </a:p>
+          <a:p>
+            <a:r>
+              <a:t>A4 across the §4.16 decisions.</a:t>
+            </a:r>
+          </a:p>
+        </p:txBody>
+      </p:sp>
+      <p:sp>
+        <p:nvSpPr>
+          <p:cNvPr id="4" name="Slide Number Placeholder 3"/>
+          <p:cNvSpPr>
+            <a:spLocks noGrp="1"/>
+          </p:cNvSpPr>
+          <p:nvPr>
+            <p:ph type="sldNum" idx="5" sz="quarter"/>
+          </p:nvPr>
+        </p:nvSpPr>
+        <p:spPr/>
+      </p:sp>
+    </p:spTree>
+  </p:cSld>
+  <p:clrMapOvr>
+    <a:masterClrMapping/>
+  </p:clrMapOvr>
+</p:notes>
+</file>
+
+<file path=ppt/notesSlides/notesSlide11.xml><?xml version="1.0" encoding="utf-8"?>
+<p:notes xmlns:a="http://schemas.openxmlformats.org/drawingml/2006/main" xmlns:p="http://schemas.openxmlformats.org/presentationml/2006/main" xmlns:r="http://schemas.openxmlformats.org/officeDocument/2006/relationships">
+  <p:cSld>
+    <p:spTree>
+      <p:nvGrpSpPr>
+        <p:cNvPr id="1" name=""/>
+        <p:cNvGrpSpPr/>
+        <p:nvPr/>
+      </p:nvGrpSpPr>
+      <p:grpSpPr>
+        <a:xfrm>
+          <a:off x="0" y="0"/>
+          <a:ext cx="0" cy="0"/>
+          <a:chOff x="0" y="0"/>
+          <a:chExt cx="0" cy="0"/>
+        </a:xfrm>
+      </p:grpSpPr>
+      <p:sp>
+        <p:nvSpPr>
+          <p:cNvPr id="2" name="Slide Image Placeholder 1"/>
+          <p:cNvSpPr>
+            <a:spLocks noGrp="1"/>
+          </p:cNvSpPr>
+          <p:nvPr>
+            <p:ph type="sldImg" idx="2"/>
+          </p:nvPr>
+        </p:nvSpPr>
+        <p:spPr/>
+      </p:sp>
+      <p:sp>
+        <p:nvSpPr>
+          <p:cNvPr id="3" name="Notes Placeholder 2"/>
+          <p:cNvSpPr>
+            <a:spLocks noGrp="1"/>
+          </p:cNvSpPr>
+          <p:nvPr>
+            <p:ph type="body" idx="3" sz="quarter"/>
+          </p:nvPr>
+        </p:nvSpPr>
+        <p:spPr/>
+        <p:txBody>
+          <a:bodyPr/>
+          <a:lstStyle/>
+          <a:p>
+            <a:r>
+              <a:t>The method made concrete — run one full example end to end so the abstract four steps become a</a:t>
+            </a:r>
+          </a:p>
+          <a:p>
+            <a:r>
+              <a:t>pattern students can copy. This is the model answer's shape.</a:t>
+            </a:r>
+          </a:p>
+          <a:p>
+            <a:r>
+              <a:t>• Walk the four steps on C3 (SQL licensing): DECISION — licence-included (pay hourly, licence built</a:t>
+            </a:r>
+          </a:p>
+          <a:p>
+            <a:r>
+              <a:t>  in) vs bring-your-own-licence (BYOL). WORKLOAD FACTS — steady business-hours use; YAT may already</a:t>
+            </a:r>
+          </a:p>
+          <a:p>
+            <a:r>
+              <a:t>  hold SQL Server licences; cost is a stated concern.</a:t>
+            </a:r>
+          </a:p>
+          <a:p>
+            <a:r>
+              <a:t>• WEIGH (accent-bold): licence-included is simpler + better for variable/short use; BYOL is cheaper</a:t>
+            </a:r>
+          </a:p>
+          <a:p>
+            <a:r>
+              <a:t>  at steady use IF you already own licences. DECIDE + JUSTIFY: pick the cheaper-over-the-term option</a:t>
+            </a:r>
+          </a:p>
+          <a:p>
+            <a:r>
+              <a:t>  for this steady workload, and say why the other was rejected.</a:t>
+            </a:r>
+          </a:p>
+          <a:p>
+            <a:r>
+              <a:t>• Point at how it reuses AT1 cost thinking — the CBA muscle from Topic 3, now applied to one build</a:t>
+            </a:r>
+          </a:p>
+          <a:p>
+            <a:r>
+              <a:t>  decision.</a:t>
+            </a:r>
+          </a:p>
+          <a:p>
+            <a:r>
+              <a:t>Misconception to pre-empt: "there's a universally right answer here." No — it depends on YAT's</a:t>
+            </a:r>
+          </a:p>
+          <a:p>
+            <a:r>
+              <a:t>facts (do they own licences? how steady?); the marks are in the reasoning, not the option chosen.</a:t>
+            </a:r>
+          </a:p>
+          <a:p>
+            <a:r>
+              <a:t>Question to pose: "Change one fact — YAT owns no SQL licences — does your answer flip, and why?"</a:t>
+            </a:r>
+          </a:p>
+          <a:p>
+            <a:r>
+              <a:t>(shows the justification is fact-driven, not memorised).</a:t>
+            </a:r>
+          </a:p>
+          <a:p>
+            <a:r>
+              <a:t>UoC/AT2 tie: PC 1.3 + KE 4 (cost models); the template for the eight §4.16 justifications.</a:t>
+            </a:r>
+          </a:p>
+        </p:txBody>
+      </p:sp>
+      <p:sp>
+        <p:nvSpPr>
+          <p:cNvPr id="4" name="Slide Number Placeholder 3"/>
+          <p:cNvSpPr>
+            <a:spLocks noGrp="1"/>
+          </p:cNvSpPr>
+          <p:nvPr>
+            <p:ph type="sldNum" idx="5" sz="quarter"/>
+          </p:nvPr>
+        </p:nvSpPr>
+        <p:spPr/>
+      </p:sp>
+    </p:spTree>
+  </p:cSld>
+  <p:clrMapOvr>
+    <a:masterClrMapping/>
+  </p:clrMapOvr>
+</p:notes>
+</file>
+
+<file path=ppt/notesSlides/notesSlide12.xml><?xml version="1.0" encoding="utf-8"?>
+<p:notes xmlns:a="http://schemas.openxmlformats.org/drawingml/2006/main" xmlns:p="http://schemas.openxmlformats.org/presentationml/2006/main" xmlns:r="http://schemas.openxmlformats.org/officeDocument/2006/relationships">
+  <p:cSld>
+    <p:spTree>
+      <p:nvGrpSpPr>
+        <p:cNvPr id="1" name=""/>
+        <p:cNvGrpSpPr/>
+        <p:nvPr/>
+      </p:nvGrpSpPr>
+      <p:grpSpPr>
+        <a:xfrm>
+          <a:off x="0" y="0"/>
+          <a:ext cx="0" cy="0"/>
+          <a:chOff x="0" y="0"/>
+          <a:chExt cx="0" cy="0"/>
+        </a:xfrm>
+      </p:grpSpPr>
+      <p:sp>
+        <p:nvSpPr>
+          <p:cNvPr id="2" name="Slide Image Placeholder 1"/>
+          <p:cNvSpPr>
+            <a:spLocks noGrp="1"/>
+          </p:cNvSpPr>
+          <p:nvPr>
+            <p:ph type="sldImg" idx="2"/>
+          </p:nvPr>
+        </p:nvSpPr>
+        <p:spPr/>
+      </p:sp>
+      <p:sp>
+        <p:nvSpPr>
+          <p:cNvPr id="3" name="Notes Placeholder 2"/>
+          <p:cNvSpPr>
+            <a:spLocks noGrp="1"/>
+          </p:cNvSpPr>
+          <p:nvPr>
+            <p:ph type="body" idx="3" sz="quarter"/>
+          </p:nvPr>
+        </p:nvSpPr>
+        <p:spPr/>
+        <p:txBody>
+          <a:bodyPr/>
+          <a:lstStyle/>
+          <a:p>
+            <a:r>
+              <a:t>Facilitation — the Topic's centrepiece practice; students write a justified rationale for every</a:t>
+            </a:r>
+          </a:p>
+          <a:p>
+            <a:r>
+              <a:t>open design decision. Budget the most time here.</a:t>
+            </a:r>
+          </a:p>
+          <a:p>
+            <a:r>
+              <a:t>Tell students: "Using the four-step method, write a justified rationale for each of the design's</a:t>
+            </a:r>
+          </a:p>
+          <a:p>
+            <a:r>
+              <a:t>open decisions — C1 to C8. Ground every one in the Ledgerline workload, not generic best practice.</a:t>
+            </a:r>
+          </a:p>
+          <a:p>
+            <a:r>
+              <a:t>These go straight into your Deployment Report."</a:t>
+            </a:r>
+          </a:p>
+          <a:p>
+            <a:r>
+              <a:t>Steps (put on the board):</a:t>
+            </a:r>
+          </a:p>
+          <a:p>
+            <a:r>
+              <a:t>1. For each decision (EC2 type, RDS class, SQL licence, EBS sizing, ASG params, backup/RPO,</a:t>
+            </a:r>
+          </a:p>
+          <a:p>
+            <a:r>
+              <a:t>   DNS/ACM, bastion/RDP): state it, give the workload facts, weigh it, name the rejected alternative.</a:t>
+            </a:r>
+          </a:p>
+          <a:p>
+            <a:r>
+              <a:t>2. Anchor to the workload: 15–25 typical / 45–55 month-end users; read-heavy at month-end;</a:t>
+            </a:r>
+          </a:p>
+          <a:p>
+            <a:r>
+              <a:t>   financial-records residency; 7-year retention; business-hours, idle overnight.</a:t>
+            </a:r>
+          </a:p>
+          <a:p>
+            <a:r>
+              <a:t>Must produce: a justified rationale per C1–C8 decision — each with a workload link, a trade-off,</a:t>
+            </a:r>
+          </a:p>
+          <a:p>
+            <a:r>
+              <a:t>and a rejected alternative (the AT2 §4.16 / A4 content).</a:t>
+            </a:r>
+          </a:p>
+          <a:p>
+            <a:r>
+              <a:t>Timing: ~30 min. Where they get stuck: generic reasoning ("more scalable", "best practice") with no</a:t>
+            </a:r>
+          </a:p>
+          <a:p>
+            <a:r>
+              <a:t>workload link — circulate and ask "for THIS client, why?"; and skipping the rejected alternative.</a:t>
+            </a:r>
+          </a:p>
+          <a:p>
+            <a:r>
+              <a:t>Share-back: take one decision (e.g. RDS class) from two students; ask the room which is more</a:t>
+            </a:r>
+          </a:p>
+          <a:p>
+            <a:r>
+              <a:t>workload-specific and which named the trade-off.</a:t>
+            </a:r>
+          </a:p>
+          <a:p>
+            <a:r>
+              <a:t>No-leakage note: practice justifications on the Accounting/Ledgerline workload; AT2 assesses the</a:t>
+            </a:r>
+          </a:p>
+          <a:p>
+            <a:r>
+              <a:t>same judgement on the LMS build — comparable, not identical.</a:t>
+            </a:r>
+          </a:p>
+        </p:txBody>
+      </p:sp>
+      <p:sp>
+        <p:nvSpPr>
+          <p:cNvPr id="4" name="Slide Number Placeholder 3"/>
+          <p:cNvSpPr>
+            <a:spLocks noGrp="1"/>
+          </p:cNvSpPr>
+          <p:nvPr>
+            <p:ph type="sldNum" idx="5" sz="quarter"/>
+          </p:nvPr>
+        </p:nvSpPr>
+        <p:spPr/>
+      </p:sp>
+    </p:spTree>
+  </p:cSld>
+  <p:clrMapOvr>
+    <a:masterClrMapping/>
+  </p:clrMapOvr>
+</p:notes>
+</file>
+
+<file path=ppt/notesSlides/notesSlide2.xml><?xml version="1.0" encoding="utf-8"?>
+<p:notes xmlns:a="http://schemas.openxmlformats.org/drawingml/2006/main" xmlns:p="http://schemas.openxmlformats.org/presentationml/2006/main" xmlns:r="http://schemas.openxmlformats.org/officeDocument/2006/relationships">
+  <p:cSld>
+    <p:spTree>
+      <p:nvGrpSpPr>
+        <p:cNvPr id="1" name=""/>
+        <p:cNvGrpSpPr/>
+        <p:nvPr/>
+      </p:nvGrpSpPr>
+      <p:grpSpPr>
+        <a:xfrm>
+          <a:off x="0" y="0"/>
+          <a:ext cx="0" cy="0"/>
+          <a:chOff x="0" y="0"/>
+          <a:chExt cx="0" cy="0"/>
+        </a:xfrm>
+      </p:grpSpPr>
+      <p:sp>
+        <p:nvSpPr>
+          <p:cNvPr id="2" name="Slide Image Placeholder 1"/>
+          <p:cNvSpPr>
+            <a:spLocks noGrp="1"/>
+          </p:cNvSpPr>
+          <p:nvPr>
+            <p:ph type="sldImg" idx="2"/>
+          </p:nvPr>
+        </p:nvSpPr>
+        <p:spPr/>
+      </p:sp>
+      <p:sp>
+        <p:nvSpPr>
+          <p:cNvPr id="3" name="Notes Placeholder 2"/>
+          <p:cNvSpPr>
+            <a:spLocks noGrp="1"/>
+          </p:cNvSpPr>
+          <p:nvPr>
+            <p:ph type="body" idx="3" sz="quarter"/>
+          </p:nvPr>
+        </p:nvSpPr>
+        <p:spPr/>
+        <p:txBody>
+          <a:bodyPr/>
+          <a:lstStyle/>
+          <a:p>
+            <a:r>
+              <a:t>Primer — vendor-neutral fundamentals before any AWS service name. Keep it plain; the CloudWatch</a:t>
+            </a:r>
+          </a:p>
+          <a:p>
+            <a:r>
+              <a:t>slide is next.</a:t>
+            </a:r>
+          </a:p>
+          <a:p>
+            <a:r>
+              <a:t>• Define the three terms cleanly: a METRIC is a measurement over time (CPU %, free storage, DB</a:t>
+            </a:r>
+          </a:p>
+          <a:p>
+            <a:r>
+              <a:t>  connections); an ALARM is a threshold on a metric that fires an action/notification when</a:t>
+            </a:r>
+          </a:p>
+          <a:p>
+            <a:r>
+              <a:t>  crossed; a LOG is a record of events — what happened, and when.</a:t>
+            </a:r>
+          </a:p>
+          <a:p>
+            <a:r>
+              <a:t>• Land the payoff line (accent-bold): you monitor so you find out before your USERS do — that's</a:t>
+            </a:r>
+          </a:p>
+          <a:p>
+            <a:r>
+              <a:t>  the whole reason it exists.</a:t>
+            </a:r>
+          </a:p>
+          <a:p>
+            <a:r>
+              <a:t>• Keep metric vs alarm vs log distinct — they conflate them; the metric is the number, the alarm</a:t>
+            </a:r>
+          </a:p>
+          <a:p>
+            <a:r>
+              <a:t>  is the rule watching the number, the log is the diary.</a:t>
+            </a:r>
+          </a:p>
+          <a:p>
+            <a:r>
+              <a:t>Misconception to pre-empt: "monitoring = looking at a dashboard sometimes." No — the value is the</a:t>
+            </a:r>
+          </a:p>
+          <a:p>
+            <a:r>
+              <a:t>alarm doing the watching for you, so a human doesn't have to stare at graphs.</a:t>
+            </a:r>
+          </a:p>
+          <a:p>
+            <a:r>
+              <a:t>Question to pose: "If YAT's database is about to run out of storage, would you rather find out from</a:t>
+            </a:r>
+          </a:p>
+          <a:p>
+            <a:r>
+              <a:t>an alarm at 15% free, or from users when it's full?" (the alarm — proactive vs reactive).</a:t>
+            </a:r>
+          </a:p>
+          <a:p>
+            <a:r>
+              <a:t>UoC/AT2 tie: ICTCLD401 KE 5 (performance monitoring and alarms); the concept the CloudWatch build</a:t>
+            </a:r>
+          </a:p>
+          <a:p>
+            <a:r>
+              <a:t>and the §4.10 evidence rest on.</a:t>
+            </a:r>
+          </a:p>
+        </p:txBody>
+      </p:sp>
+      <p:sp>
+        <p:nvSpPr>
+          <p:cNvPr id="4" name="Slide Number Placeholder 3"/>
+          <p:cNvSpPr>
+            <a:spLocks noGrp="1"/>
+          </p:cNvSpPr>
+          <p:nvPr>
+            <p:ph type="sldNum" idx="5" sz="quarter"/>
+          </p:nvPr>
+        </p:nvSpPr>
+        <p:spPr/>
+      </p:sp>
+    </p:spTree>
+  </p:cSld>
+  <p:clrMapOvr>
+    <a:masterClrMapping/>
+  </p:clrMapOvr>
+</p:notes>
+</file>
+
+<file path=ppt/notesSlides/notesSlide3.xml><?xml version="1.0" encoding="utf-8"?>
+<p:notes xmlns:a="http://schemas.openxmlformats.org/drawingml/2006/main" xmlns:p="http://schemas.openxmlformats.org/presentationml/2006/main" xmlns:r="http://schemas.openxmlformats.org/officeDocument/2006/relationships">
+  <p:cSld>
+    <p:spTree>
+      <p:nvGrpSpPr>
+        <p:cNvPr id="1" name=""/>
+        <p:cNvGrpSpPr/>
+        <p:nvPr/>
+      </p:nvGrpSpPr>
+      <p:grpSpPr>
+        <a:xfrm>
+          <a:off x="0" y="0"/>
+          <a:ext cx="0" cy="0"/>
+          <a:chOff x="0" y="0"/>
+          <a:chExt cx="0" cy="0"/>
+        </a:xfrm>
+      </p:grpSpPr>
+      <p:sp>
+        <p:nvSpPr>
+          <p:cNvPr id="2" name="Slide Image Placeholder 1"/>
+          <p:cNvSpPr>
+            <a:spLocks noGrp="1"/>
+          </p:cNvSpPr>
+          <p:nvPr>
+            <p:ph type="sldImg" idx="2"/>
+          </p:nvPr>
+        </p:nvSpPr>
+        <p:spPr/>
+      </p:sp>
+      <p:sp>
+        <p:nvSpPr>
+          <p:cNvPr id="3" name="Notes Placeholder 2"/>
+          <p:cNvSpPr>
+            <a:spLocks noGrp="1"/>
+          </p:cNvSpPr>
+          <p:nvPr>
+            <p:ph type="body" idx="3" sz="quarter"/>
+          </p:nvPr>
+        </p:nvSpPr>
+        <p:spPr/>
+        <p:txBody>
+          <a:bodyPr/>
+          <a:lstStyle/>
+          <a:p>
+            <a:r>
+              <a:t>The AWS-context teach — pin the primer terms onto the real service. Lean on the diagram; source is</a:t>
+            </a:r>
+          </a:p>
+          <a:p>
+            <a:r>
+              <a:t>ACA M10 monitoring section (S9–S12).</a:t>
+            </a:r>
+          </a:p>
+          <a:p>
+            <a:r>
+              <a:t>• Walk the three roles: CloudWatch COLLECTS metrics + logs from AWS services into one place; ALARMS</a:t>
+            </a:r>
+          </a:p>
+          <a:p>
+            <a:r>
+              <a:t>  send notifications (e.g. to SNS) or trigger actions (e.g. Auto Scaling); DASHBOARDS visualise,</a:t>
+            </a:r>
+          </a:p>
+          <a:p>
+            <a:r>
+              <a:t>  and CloudWatch LOGS centralises log files.</a:t>
+            </a:r>
+          </a:p>
+          <a:p>
+            <a:r>
+              <a:t>• Map each back to the primer: metric→collected, alarm→threshold+action, log→CloudWatch Logs.</a:t>
+            </a:r>
+          </a:p>
+          <a:p>
+            <a:r>
+              <a:t>• Tie to the Ledgerline sketch from Topic 1 — CloudWatch is the box that was "watching all of it";</a:t>
+            </a:r>
+          </a:p>
+          <a:p>
+            <a:r>
+              <a:t>  now they see what it actually does.</a:t>
+            </a:r>
+          </a:p>
+          <a:p>
+            <a:r>
+              <a:t>Misconception to pre-empt: "CloudWatch is one more thing you have to build separately." Much of it</a:t>
+            </a:r>
+          </a:p>
+          <a:p>
+            <a:r>
+              <a:t>is automatic — services publish metrics to it by default; you add the ALARMS and the log</a:t>
+            </a:r>
+          </a:p>
+          <a:p>
+            <a:r>
+              <a:t>destinations.</a:t>
+            </a:r>
+          </a:p>
+          <a:p>
+            <a:r>
+              <a:t>Question to pose: "An alarm fires — what are the two things it can do?" (notify a human via SNS, or</a:t>
+            </a:r>
+          </a:p>
+          <a:p>
+            <a:r>
+              <a:t>take an action like scaling). Sets up the demo.</a:t>
+            </a:r>
+          </a:p>
+          <a:p>
+            <a:r>
+              <a:t>UoC/AT2 tie: ICTCLD401 KE 5; this is the tool that produces the §4.10 monitoring evidence.</a:t>
+            </a:r>
+          </a:p>
+        </p:txBody>
+      </p:sp>
+      <p:sp>
+        <p:nvSpPr>
+          <p:cNvPr id="4" name="Slide Number Placeholder 3"/>
+          <p:cNvSpPr>
+            <a:spLocks noGrp="1"/>
+          </p:cNvSpPr>
+          <p:nvPr>
+            <p:ph type="sldNum" idx="5" sz="quarter"/>
+          </p:nvPr>
+        </p:nvSpPr>
+        <p:spPr/>
+      </p:sp>
+    </p:spTree>
+  </p:cSld>
+  <p:clrMapOvr>
+    <a:masterClrMapping/>
+  </p:clrMapOvr>
+</p:notes>
+</file>
+
+<file path=ppt/notesSlides/notesSlide4.xml><?xml version="1.0" encoding="utf-8"?>
+<p:notes xmlns:a="http://schemas.openxmlformats.org/drawingml/2006/main" xmlns:p="http://schemas.openxmlformats.org/presentationml/2006/main" xmlns:r="http://schemas.openxmlformats.org/officeDocument/2006/relationships">
+  <p:cSld>
+    <p:spTree>
+      <p:nvGrpSpPr>
+        <p:cNvPr id="1" name=""/>
+        <p:cNvGrpSpPr/>
+        <p:nvPr/>
+      </p:nvGrpSpPr>
+      <p:grpSpPr>
+        <a:xfrm>
+          <a:off x="0" y="0"/>
+          <a:ext cx="0" cy="0"/>
+          <a:chOff x="0" y="0"/>
+          <a:chExt cx="0" cy="0"/>
+        </a:xfrm>
+      </p:grpSpPr>
+      <p:sp>
+        <p:nvSpPr>
+          <p:cNvPr id="2" name="Slide Image Placeholder 1"/>
+          <p:cNvSpPr>
+            <a:spLocks noGrp="1"/>
+          </p:cNvSpPr>
+          <p:nvPr>
+            <p:ph type="sldImg" idx="2"/>
+          </p:nvPr>
+        </p:nvSpPr>
+        <p:spPr/>
+      </p:sp>
+      <p:sp>
+        <p:nvSpPr>
+          <p:cNvPr id="3" name="Notes Placeholder 2"/>
+          <p:cNvSpPr>
+            <a:spLocks noGrp="1"/>
+          </p:cNvSpPr>
+          <p:nvPr>
+            <p:ph type="body" idx="3" sz="quarter"/>
+          </p:nvPr>
+        </p:nvSpPr>
+        <p:spPr/>
+        <p:txBody>
+          <a:bodyPr/>
+          <a:lstStyle/>
+          <a:p>
+            <a:r>
+              <a:t>DEMONSTRATION slide (teach → demonstrate → practice). Screen/drive the demo, then relate each step</a:t>
+            </a:r>
+          </a:p>
+          <a:p>
+            <a:r>
+              <a:t>to OUR build before the activity.</a:t>
+            </a:r>
+          </a:p>
+          <a:p>
+            <a:r>
+              <a:t>WHERE TO FIND THE RECORDED DEMO: the catalogue has NO isolated recorded CloudWatch demo for Topic 9</a:t>
+            </a:r>
+          </a:p>
+          <a:p>
+            <a:r>
+              <a:t>(aws-recorded-demos-catalogue.md, "Topic 9" row: drawn from ACA M10 monitoring content, no</a:t>
+            </a:r>
+          </a:p>
+          <a:p>
+            <a:r>
+              <a:t>standalone recording). So this is the ONE live/instructor-led demo in the Topic — drive it yourself</a:t>
+            </a:r>
+          </a:p>
+          <a:p>
+            <a:r>
+              <a:t>in the Learner Lab, cued to the nearest module: ACA M10 (Automated Scaling &amp; Monitoring), the</a:t>
+            </a:r>
+          </a:p>
+          <a:p>
+            <a:r>
+              <a:t>CloudWatch monitoring section. Preview it before class.</a:t>
+            </a:r>
+          </a:p>
+          <a:p>
+            <a:r>
+              <a:t>WHAT TO DEMONSTRATE (live, then relate to the design's §4.10):</a:t>
+            </a:r>
+          </a:p>
+          <a:p>
+            <a:r>
+              <a:t>1. Pick a metric (e.g. EC2 CPU) and set a threshold and period.</a:t>
+            </a:r>
+          </a:p>
+          <a:p>
+            <a:r>
+              <a:t>2. Choose the action — a notification (SNS), or an Auto Scaling action.</a:t>
+            </a:r>
+          </a:p>
+          <a:p>
+            <a:r>
+              <a:t>3. Confirm the alarm state, and view it on a dashboard.</a:t>
+            </a:r>
+          </a:p>
+          <a:p>
+            <a:r>
+              <a:t>WHAT TO EMPHASISE:</a:t>
+            </a:r>
+          </a:p>
+          <a:p>
+            <a:r>
+              <a:t>• The threshold + period together are the alarm (e.g. ≥ 80% over 10 min) — not just the number.</a:t>
+            </a:r>
+          </a:p>
+          <a:p>
+            <a:r>
+              <a:t>• Narrate the evidence capture — students screenshot the alarm for AT2; model it live.</a:t>
+            </a:r>
+          </a:p>
+          <a:p>
+            <a:r>
+              <a:t>• Keep it BASELINE — HA-tuned alarms are AT3; don't gold-plate here.</a:t>
+            </a:r>
+          </a:p>
+          <a:p>
+            <a:r>
+              <a:t>PREP: clean Learner Lab open (us-east-1), the Accounting Baseline Design handy for §4.10 thresholds.</a:t>
+            </a:r>
+          </a:p>
+          <a:p>
+            <a:r>
+              <a:t>~6–8 min to drive + narrate before the activity.</a:t>
+            </a:r>
+          </a:p>
+        </p:txBody>
+      </p:sp>
+      <p:sp>
+        <p:nvSpPr>
+          <p:cNvPr id="4" name="Slide Number Placeholder 3"/>
+          <p:cNvSpPr>
+            <a:spLocks noGrp="1"/>
+          </p:cNvSpPr>
+          <p:nvPr>
+            <p:ph type="sldNum" idx="5" sz="quarter"/>
+          </p:nvPr>
+        </p:nvSpPr>
+        <p:spPr/>
+      </p:sp>
+    </p:spTree>
+  </p:cSld>
+  <p:clrMapOvr>
+    <a:masterClrMapping/>
+  </p:clrMapOvr>
+</p:notes>
+</file>
+
+<file path=ppt/notesSlides/notesSlide5.xml><?xml version="1.0" encoding="utf-8"?>
+<p:notes xmlns:a="http://schemas.openxmlformats.org/drawingml/2006/main" xmlns:p="http://schemas.openxmlformats.org/presentationml/2006/main" xmlns:r="http://schemas.openxmlformats.org/officeDocument/2006/relationships">
+  <p:cSld>
+    <p:spTree>
+      <p:nvGrpSpPr>
+        <p:cNvPr id="1" name=""/>
+        <p:cNvGrpSpPr/>
+        <p:nvPr/>
+      </p:nvGrpSpPr>
+      <p:grpSpPr>
+        <a:xfrm>
+          <a:off x="0" y="0"/>
+          <a:ext cx="0" cy="0"/>
+          <a:chOff x="0" y="0"/>
+          <a:chExt cx="0" cy="0"/>
+        </a:xfrm>
+      </p:grpSpPr>
+      <p:sp>
+        <p:nvSpPr>
+          <p:cNvPr id="2" name="Slide Image Placeholder 1"/>
+          <p:cNvSpPr>
+            <a:spLocks noGrp="1"/>
+          </p:cNvSpPr>
+          <p:nvPr>
+            <p:ph type="sldImg" idx="2"/>
+          </p:nvPr>
+        </p:nvSpPr>
+        <p:spPr/>
+      </p:sp>
+      <p:sp>
+        <p:nvSpPr>
+          <p:cNvPr id="3" name="Notes Placeholder 2"/>
+          <p:cNvSpPr>
+            <a:spLocks noGrp="1"/>
+          </p:cNvSpPr>
+          <p:nvPr>
+            <p:ph type="body" idx="3" sz="quarter"/>
+          </p:nvPr>
+        </p:nvSpPr>
+        <p:spPr/>
+        <p:txBody>
+          <a:bodyPr/>
+          <a:lstStyle/>
+          <a:p>
+            <a:r>
+              <a:t>Facilitation — the C1 practice; students build the design's baseline monitoring in the lab.</a:t>
+            </a:r>
+          </a:p>
+          <a:p>
+            <a:r>
+              <a:t>Tell students: "Open the lab and the Accounting Baseline Design at §4.10. Stand up the baseline</a:t>
+            </a:r>
+          </a:p>
+          <a:p>
+            <a:r>
+              <a:t>monitoring for the Ledgerline engagement — exactly the alarms and logging the design specifies —</a:t>
+            </a:r>
+          </a:p>
+          <a:p>
+            <a:r>
+              <a:t>and capture evidence as you go."</a:t>
+            </a:r>
+          </a:p>
+          <a:p>
+            <a:r>
+              <a:t>Steps (put on the board):</a:t>
+            </a:r>
+          </a:p>
+          <a:p>
+            <a:r>
+              <a:t>1. Create the baseline alarms: EC2/RDS CPU high, RDS free storage low, RDS connections high, ALB</a:t>
+            </a:r>
+          </a:p>
+          <a:p>
+            <a:r>
+              <a:t>   5XX / unhealthy host — thresholds per §4.10.</a:t>
+            </a:r>
+          </a:p>
+          <a:p>
+            <a:r>
+              <a:t>2. Enable the logging destinations: CloudWatch Logs (flow logs + RDS), ALB access logs to S3, the</a:t>
+            </a:r>
+          </a:p>
+          <a:p>
+            <a:r>
+              <a:t>   CloudWatch Agent for EC2 OS logs.</a:t>
+            </a:r>
+          </a:p>
+          <a:p>
+            <a:r>
+              <a:t>3. Capture the evidence — the alarms and the log configuration.</a:t>
+            </a:r>
+          </a:p>
+          <a:p>
+            <a:r>
+              <a:t>Must produce: screenshots of the baseline alarms and the logging config (the AT2 §4.10 evidence).</a:t>
+            </a:r>
+          </a:p>
+          <a:p>
+            <a:r>
+              <a:t>Timing: ~15 min. Where they get stuck: over-building HA-tuned alarms (rein them back to baseline),</a:t>
+            </a:r>
+          </a:p>
+          <a:p>
+            <a:r>
+              <a:t>and forgetting the log destinations because alarms feel like "the monitoring."</a:t>
+            </a:r>
+          </a:p>
+          <a:p>
+            <a:r>
+              <a:t>Share-back: ask one student to show their alarm list; confirm thresholds match the design.</a:t>
+            </a:r>
+          </a:p>
+          <a:p>
+            <a:r>
+              <a:t>No-leakage note: this is practice on the Accounting/Ledgerline baseline; AT2 assesses the same</a:t>
+            </a:r>
+          </a:p>
+          <a:p>
+            <a:r>
+              <a:t>skill on a different system — comparable, not identical.</a:t>
+            </a:r>
+          </a:p>
+        </p:txBody>
+      </p:sp>
+      <p:sp>
+        <p:nvSpPr>
+          <p:cNvPr id="4" name="Slide Number Placeholder 3"/>
+          <p:cNvSpPr>
+            <a:spLocks noGrp="1"/>
+          </p:cNvSpPr>
+          <p:nvPr>
+            <p:ph type="sldNum" idx="5" sz="quarter"/>
+          </p:nvPr>
+        </p:nvSpPr>
+        <p:spPr/>
+      </p:sp>
+    </p:spTree>
+  </p:cSld>
+  <p:clrMapOvr>
+    <a:masterClrMapping/>
+  </p:clrMapOvr>
+</p:notes>
+</file>
+
+<file path=ppt/notesSlides/notesSlide6.xml><?xml version="1.0" encoding="utf-8"?>
+<p:notes xmlns:a="http://schemas.openxmlformats.org/drawingml/2006/main" xmlns:p="http://schemas.openxmlformats.org/presentationml/2006/main" xmlns:r="http://schemas.openxmlformats.org/officeDocument/2006/relationships">
+  <p:cSld>
+    <p:spTree>
+      <p:nvGrpSpPr>
+        <p:cNvPr id="1" name=""/>
+        <p:cNvGrpSpPr/>
+        <p:nvPr/>
+      </p:nvGrpSpPr>
+      <p:grpSpPr>
+        <a:xfrm>
+          <a:off x="0" y="0"/>
+          <a:ext cx="0" cy="0"/>
+          <a:chOff x="0" y="0"/>
+          <a:chExt cx="0" cy="0"/>
+        </a:xfrm>
+      </p:grpSpPr>
+      <p:sp>
+        <p:nvSpPr>
+          <p:cNvPr id="2" name="Slide Image Placeholder 1"/>
+          <p:cNvSpPr>
+            <a:spLocks noGrp="1"/>
+          </p:cNvSpPr>
+          <p:nvPr>
+            <p:ph type="sldImg" idx="2"/>
+          </p:nvPr>
+        </p:nvSpPr>
+        <p:spPr/>
+      </p:sp>
+      <p:sp>
+        <p:nvSpPr>
+          <p:cNvPr id="3" name="Notes Placeholder 2"/>
+          <p:cNvSpPr>
+            <a:spLocks noGrp="1"/>
+          </p:cNvSpPr>
+          <p:nvPr>
+            <p:ph type="body" idx="3" sz="quarter"/>
+          </p:nvPr>
+        </p:nvSpPr>
+        <p:spPr/>
+        <p:txBody>
+          <a:bodyPr/>
+          <a:lstStyle/>
+          <a:p>
+            <a:r>
+              <a:t>Primer — the C2 fundamental. Short but load-bearing; students think building IS finishing.</a:t>
+            </a:r>
+          </a:p>
+          <a:p>
+            <a:r>
+              <a:t>• The core distinction (first bullet): building something is NOT the same as confirming it does</a:t>
+            </a:r>
+          </a:p>
+          <a:p>
+            <a:r>
+              <a:t>  what was asked. Say it twice — it's the whole point.</a:t>
+            </a:r>
+          </a:p>
+          <a:p>
+            <a:r>
+              <a:t>• Define the loop (accent-bold): validation = test → observe → compare to the requirement/design →</a:t>
+            </a:r>
+          </a:p>
+          <a:p>
+            <a:r>
+              <a:t>  fix. Four moves, not "have a look."</a:t>
+            </a:r>
+          </a:p>
+          <a:p>
+            <a:r>
+              <a:t>• Frame it as how you AND the assessor know the build actually meets the spec — it's evidence, not</a:t>
+            </a:r>
+          </a:p>
+          <a:p>
+            <a:r>
+              <a:t>  a vibe.</a:t>
+            </a:r>
+          </a:p>
+          <a:p>
+            <a:r>
+              <a:t>Misconception to pre-empt: "it launched without errors, so it's validated." No — no error at build</a:t>
+            </a:r>
+          </a:p>
+          <a:p>
+            <a:r>
+              <a:t>time doesn't prove it meets the requirement (e.g. that staff can actually reach the app, that it</a:t>
+            </a:r>
+          </a:p>
+          <a:p>
+            <a:r>
+              <a:t>scales). You must test against the spec.</a:t>
+            </a:r>
+          </a:p>
+          <a:p>
+            <a:r>
+              <a:t>Question to pose: "You deployed it and nothing errored — what have you actually PROVEN, and what</a:t>
+            </a:r>
+          </a:p>
+          <a:p>
+            <a:r>
+              <a:t>haven't you?" (proven it deployed; not proven it meets the design).</a:t>
+            </a:r>
+          </a:p>
+          <a:p>
+            <a:r>
+              <a:t>UoC/AT2 tie: ICTCLD401 PC 2.6 (test access, fix errors) + PC 3.2 (test scaling, fix errors) —</a:t>
+            </a:r>
+          </a:p>
+          <a:p>
+            <a:r>
+              <a:t>developed in Topics 7–8, VALIDATED here against the design.</a:t>
+            </a:r>
+          </a:p>
+        </p:txBody>
+      </p:sp>
+      <p:sp>
+        <p:nvSpPr>
+          <p:cNvPr id="4" name="Slide Number Placeholder 3"/>
+          <p:cNvSpPr>
+            <a:spLocks noGrp="1"/>
+          </p:cNvSpPr>
+          <p:nvPr>
+            <p:ph type="sldNum" idx="5" sz="quarter"/>
+          </p:nvPr>
+        </p:nvSpPr>
+        <p:spPr/>
+      </p:sp>
+    </p:spTree>
+  </p:cSld>
+  <p:clrMapOvr>
+    <a:masterClrMapping/>
+  </p:clrMapOvr>
+</p:notes>
+</file>
+
+<file path=ppt/notesSlides/notesSlide7.xml><?xml version="1.0" encoding="utf-8"?>
+<p:notes xmlns:a="http://schemas.openxmlformats.org/drawingml/2006/main" xmlns:p="http://schemas.openxmlformats.org/presentationml/2006/main" xmlns:r="http://schemas.openxmlformats.org/officeDocument/2006/relationships">
+  <p:cSld>
+    <p:spTree>
+      <p:nvGrpSpPr>
+        <p:cNvPr id="1" name=""/>
+        <p:cNvGrpSpPr/>
+        <p:nvPr/>
+      </p:nvGrpSpPr>
+      <p:grpSpPr>
+        <a:xfrm>
+          <a:off x="0" y="0"/>
+          <a:ext cx="0" cy="0"/>
+          <a:chOff x="0" y="0"/>
+          <a:chExt cx="0" cy="0"/>
+        </a:xfrm>
+      </p:grpSpPr>
+      <p:sp>
+        <p:nvSpPr>
+          <p:cNvPr id="2" name="Slide Image Placeholder 1"/>
+          <p:cNvSpPr>
+            <a:spLocks noGrp="1"/>
+          </p:cNvSpPr>
+          <p:nvPr>
+            <p:ph type="sldImg" idx="2"/>
+          </p:nvPr>
+        </p:nvSpPr>
+        <p:spPr/>
+      </p:sp>
+      <p:sp>
+        <p:nvSpPr>
+          <p:cNvPr id="3" name="Notes Placeholder 2"/>
+          <p:cNvSpPr>
+            <a:spLocks noGrp="1"/>
+          </p:cNvSpPr>
+          <p:nvPr>
+            <p:ph type="body" idx="3" sz="quarter"/>
+          </p:nvPr>
+        </p:nvSpPr>
+        <p:spPr/>
+        <p:txBody>
+          <a:bodyPr/>
+          <a:lstStyle/>
+          <a:p>
+            <a:r>
+              <a:t>The C2 teach — consolidate earlier tests into one deliberate validation. This is where scattered</a:t>
+            </a:r>
+          </a:p>
+          <a:p>
+            <a:r>
+              <a:t>testing becomes a defensible check.</a:t>
+            </a:r>
+          </a:p>
+          <a:p>
+            <a:r>
+              <a:t>• Walk it: pull together the tests already run in Topics 7–8 — connectivity (Reachability</a:t>
+            </a:r>
+          </a:p>
+          <a:p>
+            <a:r>
+              <a:t>  Analyzer), app→database, and scaling — don't re-invent them, consolidate them.</a:t>
+            </a:r>
+          </a:p>
+          <a:p>
+            <a:r>
+              <a:t>• Check against the design's RECOVERY OBJECTIVES: RPO ≤ 1 hour, RTO ≤ 1 business day. Explain both</a:t>
+            </a:r>
+          </a:p>
+          <a:p>
+            <a:r>
+              <a:t>  plainly — RPO = how much data you can afford to lose; RTO = how long to be back up.</a:t>
+            </a:r>
+          </a:p>
+          <a:p>
+            <a:r>
+              <a:t>• The honesty line (accent-bold): name the known limit — this baseline is SINGLE-AZ; the single AZ</a:t>
+            </a:r>
+          </a:p>
+          <a:p>
+            <a:r>
+              <a:t>  and single RDS instance are SPOFs. Then the last bullet: that's TOLERABLE for a business-hours</a:t>
+            </a:r>
+          </a:p>
+          <a:p>
+            <a:r>
+              <a:t>  service now, and is precisely the objective of the AT3 HA design.</a:t>
+            </a:r>
+          </a:p>
+          <a:p>
+            <a:r>
+              <a:t>Misconception to pre-empt: that naming the SPOF is admitting a failure. The opposite — naming a</a:t>
+            </a:r>
+          </a:p>
+          <a:p>
+            <a:r>
+              <a:t>known, accepted limit honestly is what a professional validation DOES; hiding it loses marks.</a:t>
+            </a:r>
+          </a:p>
+          <a:p>
+            <a:r>
+              <a:t>Question to pose: "The build has a single-AZ SPOF — do you hide that in the report, or name it?</a:t>
+            </a:r>
+          </a:p>
+          <a:p>
+            <a:r>
+              <a:t>Why?" (name it — it's honest, and it's the AT3 brief).</a:t>
+            </a:r>
+          </a:p>
+          <a:p>
+            <a:r>
+              <a:t>UoC/AT2 tie: PC 2.6 · PC 3.2; AT2 §4.13 recovery objectives (baseline state), A-build / A10.</a:t>
+            </a:r>
+          </a:p>
+        </p:txBody>
+      </p:sp>
+      <p:sp>
+        <p:nvSpPr>
+          <p:cNvPr id="4" name="Slide Number Placeholder 3"/>
+          <p:cNvSpPr>
+            <a:spLocks noGrp="1"/>
+          </p:cNvSpPr>
+          <p:nvPr>
+            <p:ph type="sldNum" idx="5" sz="quarter"/>
+          </p:nvPr>
+        </p:nvSpPr>
+        <p:spPr/>
+      </p:sp>
+    </p:spTree>
+  </p:cSld>
+  <p:clrMapOvr>
+    <a:masterClrMapping/>
+  </p:clrMapOvr>
+</p:notes>
+</file>
+
+<file path=ppt/notesSlides/notesSlide8.xml><?xml version="1.0" encoding="utf-8"?>
+<p:notes xmlns:a="http://schemas.openxmlformats.org/drawingml/2006/main" xmlns:p="http://schemas.openxmlformats.org/presentationml/2006/main" xmlns:r="http://schemas.openxmlformats.org/officeDocument/2006/relationships">
+  <p:cSld>
+    <p:spTree>
+      <p:nvGrpSpPr>
+        <p:cNvPr id="1" name=""/>
+        <p:cNvGrpSpPr/>
+        <p:nvPr/>
+      </p:nvGrpSpPr>
+      <p:grpSpPr>
+        <a:xfrm>
+          <a:off x="0" y="0"/>
+          <a:ext cx="0" cy="0"/>
+          <a:chOff x="0" y="0"/>
+          <a:chExt cx="0" cy="0"/>
+        </a:xfrm>
+      </p:grpSpPr>
+      <p:sp>
+        <p:nvSpPr>
+          <p:cNvPr id="2" name="Slide Image Placeholder 1"/>
+          <p:cNvSpPr>
+            <a:spLocks noGrp="1"/>
+          </p:cNvSpPr>
+          <p:nvPr>
+            <p:ph type="sldImg" idx="2"/>
+          </p:nvPr>
+        </p:nvSpPr>
+        <p:spPr/>
+      </p:sp>
+      <p:sp>
+        <p:nvSpPr>
+          <p:cNvPr id="3" name="Notes Placeholder 2"/>
+          <p:cNvSpPr>
+            <a:spLocks noGrp="1"/>
+          </p:cNvSpPr>
+          <p:nvPr>
+            <p:ph type="body" idx="3" sz="quarter"/>
+          </p:nvPr>
+        </p:nvSpPr>
+        <p:spPr/>
+        <p:txBody>
+          <a:bodyPr/>
+          <a:lstStyle/>
+          <a:p>
+            <a:r>
+              <a:t>Facilitation — the C2 practice; a validation pass in the lab against the design.</a:t>
+            </a:r>
+          </a:p>
+          <a:p>
+            <a:r>
+              <a:t>Tell students: "Run a validation pass on your Ledgerline build against the Accounting Baseline</a:t>
+            </a:r>
+          </a:p>
+          <a:p>
+            <a:r>
+              <a:t>Design. You're not building — you're proving it meets the spec, and recording the result."</a:t>
+            </a:r>
+          </a:p>
+          <a:p>
+            <a:r>
+              <a:t>Steps (put on the board):</a:t>
+            </a:r>
+          </a:p>
+          <a:p>
+            <a:r>
+              <a:t>1. Confirm connectivity: staff→ALB and app→database; and confirm the scaling behaviour.</a:t>
+            </a:r>
+          </a:p>
+          <a:p>
+            <a:r>
+              <a:t>2. Check the recovery objectives are met (RPO ≤ 1 h, RTO ≤ 1 business day); note the single-AZ SPOF.</a:t>
+            </a:r>
+          </a:p>
+          <a:p>
+            <a:r>
+              <a:t>3. Record each result and any fix; capture evidence.</a:t>
+            </a:r>
+          </a:p>
+          <a:p>
+            <a:r>
+              <a:t>Must produce: a short validation record — each test, its result, any fix, and the named SPOF (the</a:t>
+            </a:r>
+          </a:p>
+          <a:p>
+            <a:r>
+              <a:t>AT2 §4.13 / A10 evidence).</a:t>
+            </a:r>
+          </a:p>
+          <a:p>
+            <a:r>
+              <a:t>Timing: ~15 min. Where they get stuck: treating it as re-testing from scratch — remind them the</a:t>
+            </a:r>
+          </a:p>
+          <a:p>
+            <a:r>
+              <a:t>tests were RUN in Topics 7–8; today is consolidating + comparing to the design. Also, students omit</a:t>
+            </a:r>
+          </a:p>
+          <a:p>
+            <a:r>
+              <a:t>the SPOF because it feels like a fault — push them to name it.</a:t>
+            </a:r>
+          </a:p>
+          <a:p>
+            <a:r>
+              <a:t>Share-back: take one student's validation record; confirm every result is compared to a design</a:t>
+            </a:r>
+          </a:p>
+          <a:p>
+            <a:r>
+              <a:t>requirement, not just "it worked."</a:t>
+            </a:r>
+          </a:p>
+          <a:p>
+            <a:r>
+              <a:t>No-leakage note: practice on the Accounting baseline; the assessed validation is on the LMS system —</a:t>
+            </a:r>
+          </a:p>
+          <a:p>
+            <a:r>
+              <a:t>same discipline, different system.</a:t>
+            </a:r>
+          </a:p>
+        </p:txBody>
+      </p:sp>
+      <p:sp>
+        <p:nvSpPr>
+          <p:cNvPr id="4" name="Slide Number Placeholder 3"/>
+          <p:cNvSpPr>
+            <a:spLocks noGrp="1"/>
+          </p:cNvSpPr>
+          <p:nvPr>
+            <p:ph type="sldNum" idx="5" sz="quarter"/>
+          </p:nvPr>
+        </p:nvSpPr>
+        <p:spPr/>
+      </p:sp>
+    </p:spTree>
+  </p:cSld>
+  <p:clrMapOvr>
+    <a:masterClrMapping/>
+  </p:clrMapOvr>
+</p:notes>
+</file>
+
+<file path=ppt/notesSlides/notesSlide9.xml><?xml version="1.0" encoding="utf-8"?>
+<p:notes xmlns:a="http://schemas.openxmlformats.org/drawingml/2006/main" xmlns:p="http://schemas.openxmlformats.org/presentationml/2006/main" xmlns:r="http://schemas.openxmlformats.org/officeDocument/2006/relationships">
+  <p:cSld>
+    <p:spTree>
+      <p:nvGrpSpPr>
+        <p:cNvPr id="1" name=""/>
+        <p:cNvGrpSpPr/>
+        <p:nvPr/>
+      </p:nvGrpSpPr>
+      <p:grpSpPr>
+        <a:xfrm>
+          <a:off x="0" y="0"/>
+          <a:ext cx="0" cy="0"/>
+          <a:chOff x="0" y="0"/>
+          <a:chExt cx="0" cy="0"/>
+        </a:xfrm>
+      </p:grpSpPr>
+      <p:sp>
+        <p:nvSpPr>
+          <p:cNvPr id="2" name="Slide Image Placeholder 1"/>
+          <p:cNvSpPr>
+            <a:spLocks noGrp="1"/>
+          </p:cNvSpPr>
+          <p:nvPr>
+            <p:ph type="sldImg" idx="2"/>
+          </p:nvPr>
+        </p:nvSpPr>
+        <p:spPr/>
+      </p:sp>
+      <p:sp>
+        <p:nvSpPr>
+          <p:cNvPr id="3" name="Notes Placeholder 2"/>
+          <p:cNvSpPr>
+            <a:spLocks noGrp="1"/>
+          </p:cNvSpPr>
+          <p:nvPr>
+            <p:ph type="body" idx="3" sz="quarter"/>
+          </p:nvPr>
+        </p:nvSpPr>
+        <p:spPr/>
+        <p:txBody>
+          <a:bodyPr/>
+          <a:lstStyle/>
+          <a:p>
+            <a:r>
+              <a:t>Primer opening the centrepiece Section — the single highest-value idea in the Topic. Slow down.</a:t>
+            </a:r>
+          </a:p>
+          <a:p>
+            <a:r>
+              <a:t>• Contrast the two bullets out loud: "I chose X" is NOT a justification. "I chose X because the</a:t>
+            </a:r>
+          </a:p>
+          <a:p>
+            <a:r>
+              <a:t>  workload needs Y, weighed against cost/security/residency — and the alternative was worse, for</a:t>
+            </a:r>
+          </a:p>
+          <a:p>
+            <a:r>
+              <a:t>  these reasons" IS (the accent-bold line).</a:t>
+            </a:r>
+          </a:p>
+          <a:p>
+            <a:r>
+              <a:t>• The defining test (last bullet): a justification is SPECIFIC to this workload and NAMES the</a:t>
+            </a:r>
+          </a:p>
+          <a:p>
+            <a:r>
+              <a:t>  trade-off. Generic best practice ("it's more scalable") is not a justification.</a:t>
+            </a:r>
+          </a:p>
+          <a:p>
+            <a:r>
+              <a:t>• Set expectations: this is the marked AT2 judgement (A4) — the difference between a pass build and</a:t>
+            </a:r>
+          </a:p>
+          <a:p>
+            <a:r>
+              <a:t>  a strong one lives here.</a:t>
+            </a:r>
+          </a:p>
+          <a:p>
+            <a:r>
+              <a:t>Misconception to pre-empt: "justify = describe what I did." No — describing the config is the</a:t>
+            </a:r>
+          </a:p>
+          <a:p>
+            <a:r>
+              <a:t>build; justifying is defending WHY, against this client's needs and the rejected alternative.</a:t>
+            </a:r>
+          </a:p>
+          <a:p>
+            <a:r>
+              <a:t>Question to pose: "'I picked a t3.medium because it's a good all-rounder' — why does that earn</a:t>
+            </a:r>
+          </a:p>
+          <a:p>
+            <a:r>
+              <a:t>almost nothing, and what would fix it?" (no workload link, no trade-off, no alternative).</a:t>
+            </a:r>
+          </a:p>
+          <a:p>
+            <a:r>
+              <a:t>UoC/AT2 tie: ICTCLD401 PC 1.1 · PC 1.3 · PC 1.8 (+ KE 6 options / KE 4 cost); AT2 §4.16, criterion</a:t>
+            </a:r>
+          </a:p>
+          <a:p>
+            <a:r>
+              <a:t>A4 — the marked judgement.</a:t>
+            </a:r>
+          </a:p>
+        </p:txBody>
+      </p:sp>
+      <p:sp>
+        <p:nvSpPr>
+          <p:cNvPr id="4" name="Slide Number Placeholder 3"/>
+          <p:cNvSpPr>
+            <a:spLocks noGrp="1"/>
+          </p:cNvSpPr>
+          <p:nvPr>
+            <p:ph type="sldNum" idx="5" sz="quarter"/>
+          </p:nvPr>
+        </p:nvSpPr>
+        <p:spPr/>
+      </p:sp>
+    </p:spTree>
+  </p:cSld>
+  <p:clrMapOvr>
+    <a:masterClrMapping/>
+  </p:clrMapOvr>
+</p:notes>
 </file>
 
 <file path=ppt/slideLayouts/slideLayout1.xml><?xml version="1.0" encoding="utf-8"?>
@@ -14101,4 +16141,324 @@
   </a:objectDefaults>
   <a:extraClrSchemeLst/>
 </a:theme>
+</file>
+
+<file path=ppt/theme/theme2.xml><?xml version="1.0" encoding="utf-8"?>
+<a:theme xmlns:a="http://schemas.openxmlformats.org/drawingml/2006/main" name="Office Theme">
+  <a:themeElements>
+    <a:clrScheme name="Office">
+      <a:dk1>
+        <a:sysClr val="windowText" lastClr="000000"/>
+      </a:dk1>
+      <a:lt1>
+        <a:sysClr val="window" lastClr="FFFFFF"/>
+      </a:lt1>
+      <a:dk2>
+        <a:srgbClr val="1F497D"/>
+      </a:dk2>
+      <a:lt2>
+        <a:srgbClr val="EEECE1"/>
+      </a:lt2>
+      <a:accent1>
+        <a:srgbClr val="4F81BD"/>
+      </a:accent1>
+      <a:accent2>
+        <a:srgbClr val="C0504D"/>
+      </a:accent2>
+      <a:accent3>
+        <a:srgbClr val="9BBB59"/>
+      </a:accent3>
+      <a:accent4>
+        <a:srgbClr val="8064A2"/>
+      </a:accent4>
+      <a:accent5>
+        <a:srgbClr val="4BACC6"/>
+      </a:accent5>
+      <a:accent6>
+        <a:srgbClr val="F79646"/>
+      </a:accent6>
+      <a:hlink>
+        <a:srgbClr val="0000FF"/>
+      </a:hlink>
+      <a:folHlink>
+        <a:srgbClr val="800080"/>
+      </a:folHlink>
+    </a:clrScheme>
+    <a:fontScheme name="Office">
+      <a:majorFont>
+        <a:latin typeface="Calibri"/>
+        <a:ea typeface=""/>
+        <a:cs typeface=""/>
+        <a:font script="Jpan" typeface="ＭＳ Ｐゴシック"/>
+        <a:font script="Hang" typeface="맑은 고딕"/>
+        <a:font script="Hans" typeface="宋体"/>
+        <a:font script="Hant" typeface="新細明體"/>
+        <a:font script="Arab" typeface="Times New Roman"/>
+        <a:font script="Hebr" typeface="Times New Roman"/>
+        <a:font script="Thai" typeface="Angsana New"/>
+        <a:font script="Ethi" typeface="Nyala"/>
+        <a:font script="Beng" typeface="Vrinda"/>
+        <a:font script="Gujr" typeface="Shruti"/>
+        <a:font script="Khmr" typeface="MoolBoran"/>
+        <a:font script="Knda" typeface="Tunga"/>
+        <a:font script="Guru" typeface="Raavi"/>
+        <a:font script="Cans" typeface="Euphemia"/>
+        <a:font script="Cher" typeface="Plantagenet Cherokee"/>
+        <a:font script="Yiii" typeface="Microsoft Yi Baiti"/>
+        <a:font script="Tibt" typeface="Microsoft Himalaya"/>
+        <a:font script="Thaa" typeface="MV Boli"/>
+        <a:font script="Deva" typeface="Mangal"/>
+        <a:font script="Telu" typeface="Gautami"/>
+        <a:font script="Taml" typeface="Latha"/>
+        <a:font script="Syrc" typeface="Estrangelo Edessa"/>
+        <a:font script="Orya" typeface="Kalinga"/>
+        <a:font script="Mlym" typeface="Kartika"/>
+        <a:font script="Laoo" typeface="DokChampa"/>
+        <a:font script="Sinh" typeface="Iskoola Pota"/>
+        <a:font script="Mong" typeface="Mongolian Baiti"/>
+        <a:font script="Viet" typeface="Times New Roman"/>
+        <a:font script="Uigh" typeface="Microsoft Uighur"/>
+        <a:font script="Geor" typeface="Sylfaen"/>
+      </a:majorFont>
+      <a:minorFont>
+        <a:latin typeface="Calibri"/>
+        <a:ea typeface=""/>
+        <a:cs typeface=""/>
+        <a:font script="Jpan" typeface="ＭＳ Ｐゴシック"/>
+        <a:font script="Hang" typeface="맑은 고딕"/>
+        <a:font script="Hans" typeface="宋体"/>
+        <a:font script="Hant" typeface="新細明體"/>
+        <a:font script="Arab" typeface="Arial"/>
+        <a:font script="Hebr" typeface="Arial"/>
+        <a:font script="Thai" typeface="Cordia New"/>
+        <a:font script="Ethi" typeface="Nyala"/>
+        <a:font script="Beng" typeface="Vrinda"/>
+        <a:font script="Gujr" typeface="Shruti"/>
+        <a:font script="Khmr" typeface="DaunPenh"/>
+        <a:font script="Knda" typeface="Tunga"/>
+        <a:font script="Guru" typeface="Raavi"/>
+        <a:font script="Cans" typeface="Euphemia"/>
+        <a:font script="Cher" typeface="Plantagenet Cherokee"/>
+        <a:font script="Yiii" typeface="Microsoft Yi Baiti"/>
+        <a:font script="Tibt" typeface="Microsoft Himalaya"/>
+        <a:font script="Thaa" typeface="MV Boli"/>
+        <a:font script="Deva" typeface="Mangal"/>
+        <a:font script="Telu" typeface="Gautami"/>
+        <a:font script="Taml" typeface="Latha"/>
+        <a:font script="Syrc" typeface="Estrangelo Edessa"/>
+        <a:font script="Orya" typeface="Kalinga"/>
+        <a:font script="Mlym" typeface="Kartika"/>
+        <a:font script="Laoo" typeface="DokChampa"/>
+        <a:font script="Sinh" typeface="Iskoola Pota"/>
+        <a:font script="Mong" typeface="Mongolian Baiti"/>
+        <a:font script="Viet" typeface="Arial"/>
+        <a:font script="Uigh" typeface="Microsoft Uighur"/>
+        <a:font script="Geor" typeface="Sylfaen"/>
+      </a:minorFont>
+    </a:fontScheme>
+    <a:fmtScheme name="Office">
+      <a:fillStyleLst>
+        <a:solidFill>
+          <a:schemeClr val="phClr"/>
+        </a:solidFill>
+        <a:gradFill rotWithShape="1">
+          <a:gsLst>
+            <a:gs pos="0">
+              <a:schemeClr val="phClr">
+                <a:tint val="50000"/>
+                <a:satMod val="300000"/>
+              </a:schemeClr>
+            </a:gs>
+            <a:gs pos="35000">
+              <a:schemeClr val="phClr">
+                <a:tint val="37000"/>
+                <a:satMod val="300000"/>
+              </a:schemeClr>
+            </a:gs>
+            <a:gs pos="100000">
+              <a:schemeClr val="phClr">
+                <a:tint val="15000"/>
+                <a:satMod val="350000"/>
+              </a:schemeClr>
+            </a:gs>
+          </a:gsLst>
+          <a:lin ang="16200000" scaled="1"/>
+        </a:gradFill>
+        <a:gradFill rotWithShape="1">
+          <a:gsLst>
+            <a:gs pos="0">
+              <a:schemeClr val="phClr">
+                <a:tint val="100000"/>
+                <a:shade val="100000"/>
+                <a:satMod val="130000"/>
+              </a:schemeClr>
+            </a:gs>
+            <a:gs pos="100000">
+              <a:schemeClr val="phClr">
+                <a:tint val="50000"/>
+                <a:shade val="100000"/>
+                <a:satMod val="350000"/>
+              </a:schemeClr>
+            </a:gs>
+          </a:gsLst>
+          <a:lin ang="16200000" scaled="0"/>
+        </a:gradFill>
+      </a:fillStyleLst>
+      <a:lnStyleLst>
+        <a:ln w="9525" cap="flat" cmpd="sng" algn="ctr">
+          <a:solidFill>
+            <a:schemeClr val="phClr">
+              <a:shade val="95000"/>
+              <a:satMod val="105000"/>
+            </a:schemeClr>
+          </a:solidFill>
+          <a:prstDash val="solid"/>
+        </a:ln>
+        <a:ln w="25400" cap="flat" cmpd="sng" algn="ctr">
+          <a:solidFill>
+            <a:schemeClr val="phClr"/>
+          </a:solidFill>
+          <a:prstDash val="solid"/>
+        </a:ln>
+        <a:ln w="38100" cap="flat" cmpd="sng" algn="ctr">
+          <a:solidFill>
+            <a:schemeClr val="phClr"/>
+          </a:solidFill>
+          <a:prstDash val="solid"/>
+        </a:ln>
+      </a:lnStyleLst>
+      <a:effectStyleLst>
+        <a:effectStyle>
+          <a:effectLst>
+            <a:outerShdw blurRad="40000" dist="20000" dir="5400000" rotWithShape="0">
+              <a:srgbClr val="000000">
+                <a:alpha val="38000"/>
+              </a:srgbClr>
+            </a:outerShdw>
+          </a:effectLst>
+        </a:effectStyle>
+        <a:effectStyle>
+          <a:effectLst>
+            <a:outerShdw blurRad="40000" dist="23000" dir="5400000" rotWithShape="0">
+              <a:srgbClr val="000000">
+                <a:alpha val="35000"/>
+              </a:srgbClr>
+            </a:outerShdw>
+          </a:effectLst>
+        </a:effectStyle>
+        <a:effectStyle>
+          <a:effectLst>
+            <a:outerShdw blurRad="40000" dist="23000" dir="5400000" rotWithShape="0">
+              <a:srgbClr val="000000">
+                <a:alpha val="35000"/>
+              </a:srgbClr>
+            </a:outerShdw>
+          </a:effectLst>
+          <a:scene3d>
+            <a:camera prst="orthographicFront">
+              <a:rot lat="0" lon="0" rev="0"/>
+            </a:camera>
+            <a:lightRig rig="threePt" dir="t">
+              <a:rot lat="0" lon="0" rev="1200000"/>
+            </a:lightRig>
+          </a:scene3d>
+          <a:sp3d>
+            <a:bevelT w="63500" h="25400"/>
+          </a:sp3d>
+        </a:effectStyle>
+      </a:effectStyleLst>
+      <a:bgFillStyleLst>
+        <a:solidFill>
+          <a:schemeClr val="phClr"/>
+        </a:solidFill>
+        <a:gradFill rotWithShape="1">
+          <a:gsLst>
+            <a:gs pos="0">
+              <a:schemeClr val="phClr">
+                <a:tint val="40000"/>
+                <a:satMod val="350000"/>
+              </a:schemeClr>
+            </a:gs>
+            <a:gs pos="40000">
+              <a:schemeClr val="phClr">
+                <a:tint val="45000"/>
+                <a:shade val="99000"/>
+                <a:satMod val="350000"/>
+              </a:schemeClr>
+            </a:gs>
+            <a:gs pos="100000">
+              <a:schemeClr val="phClr">
+                <a:shade val="20000"/>
+                <a:satMod val="255000"/>
+              </a:schemeClr>
+            </a:gs>
+          </a:gsLst>
+          <a:path path="circle">
+            <a:fillToRect l="50000" t="-80000" r="50000" b="180000"/>
+          </a:path>
+        </a:gradFill>
+        <a:gradFill rotWithShape="1">
+          <a:gsLst>
+            <a:gs pos="0">
+              <a:schemeClr val="phClr">
+                <a:tint val="80000"/>
+                <a:satMod val="300000"/>
+              </a:schemeClr>
+            </a:gs>
+            <a:gs pos="100000">
+              <a:schemeClr val="phClr">
+                <a:shade val="30000"/>
+                <a:satMod val="200000"/>
+              </a:schemeClr>
+            </a:gs>
+          </a:gsLst>
+          <a:path path="circle">
+            <a:fillToRect l="50000" t="50000" r="50000" b="50000"/>
+          </a:path>
+        </a:gradFill>
+      </a:bgFillStyleLst>
+    </a:fmtScheme>
+  </a:themeElements>
+  <a:objectDefaults>
+    <a:spDef>
+      <a:spPr/>
+      <a:bodyPr/>
+      <a:lstStyle/>
+      <a:style>
+        <a:lnRef idx="1">
+          <a:schemeClr val="accent1"/>
+        </a:lnRef>
+        <a:fillRef idx="3">
+          <a:schemeClr val="accent1"/>
+        </a:fillRef>
+        <a:effectRef idx="2">
+          <a:schemeClr val="accent1"/>
+        </a:effectRef>
+        <a:fontRef idx="minor">
+          <a:schemeClr val="lt1"/>
+        </a:fontRef>
+      </a:style>
+    </a:spDef>
+    <a:lnDef>
+      <a:spPr/>
+      <a:bodyPr/>
+      <a:lstStyle/>
+      <a:style>
+        <a:lnRef idx="2">
+          <a:schemeClr val="accent1"/>
+        </a:lnRef>
+        <a:fillRef idx="0">
+          <a:schemeClr val="accent1"/>
+        </a:fillRef>
+        <a:effectRef idx="1">
+          <a:schemeClr val="accent1"/>
+        </a:effectRef>
+        <a:fontRef idx="minor">
+          <a:schemeClr val="tx1"/>
+        </a:fontRef>
+      </a:style>
+    </a:lnDef>
+  </a:objectDefaults>
+  <a:extraClrSchemeLst/>
+</a:theme>
 </file>
--- a/S1-CL1-Cloud-Design-Build/delivery/topic_09/Topic_09_Slides.pptx
+++ b/S1-CL1-Cloud-Design-Build/delivery/topic_09/Topic_09_Slides.pptx
@@ -534,7 +534,7 @@
           </a:p>
           <a:p>
             <a:r>
-              <a:t>  not more building — it's making that build operable and defensible.</a:t>
+              <a:t>not more building — it's making that build operable and defensible.</a:t>
             </a:r>
           </a:p>
           <a:p>
@@ -544,7 +544,7 @@
           </a:p>
           <a:p>
             <a:r>
-              <a:t>  decisions. Each maps to a Section today (C1 monitoring, C2 validation, C3 justification).</a:t>
+              <a:t>decisions. Each maps to a Section today (C1 monitoring, C2 validation, C3 justification).</a:t>
             </a:r>
           </a:p>
           <a:p>
@@ -554,7 +554,7 @@
           </a:p>
           <a:p>
             <a:r>
-              <a:t>  MARKED on — this isn't housekeeping, it's the assessed judgement.</a:t>
+              <a:t>MARKED on — this isn't housekeeping, it's the assessed judgement.</a:t>
             </a:r>
           </a:p>
           <a:p>
@@ -674,12 +674,12 @@
           </a:p>
           <a:p>
             <a:r>
-              <a:t>  bear on it — load, pattern, data sensitivity, residency, cost appetite. 3. WEIGH it —</a:t>
-            </a:r>
-          </a:p>
-          <a:p>
-            <a:r>
-              <a:t>  performance vs cost vs security vs residency. 4. Name the ALTERNATIVE and why you rejected it.</a:t>
+              <a:t>bear on it — load, pattern, data sensitivity, residency, cost appetite. 3. WEIGH it —</a:t>
+            </a:r>
+          </a:p>
+          <a:p>
+            <a:r>
+              <a:t>performance vs cost vs security vs residency. 4. Name the ALTERNATIVE and why you rejected it.</a:t>
             </a:r>
           </a:p>
           <a:p>
@@ -689,7 +689,7 @@
           </a:p>
           <a:p>
             <a:r>
-              <a:t>  proves the choice was a judgement, not a default.</a:t>
+              <a:t>proves the choice was a judgement, not a default.</a:t>
             </a:r>
           </a:p>
           <a:p>
@@ -699,7 +699,7 @@
           </a:p>
           <a:p>
             <a:r>
-              <a:t>  report defensible.</a:t>
+              <a:t>report defensible.</a:t>
             </a:r>
           </a:p>
           <a:p>
@@ -814,12 +814,12 @@
           </a:p>
           <a:p>
             <a:r>
-              <a:t>  in) vs bring-your-own-licence (BYOL). WORKLOAD FACTS — steady business-hours use; YAT may already</a:t>
-            </a:r>
-          </a:p>
-          <a:p>
-            <a:r>
-              <a:t>  hold SQL Server licences; cost is a stated concern.</a:t>
+              <a:t>in) vs bring-your-own-licence (BYOL). WORKLOAD FACTS — steady business-hours use; YAT may already</a:t>
+            </a:r>
+          </a:p>
+          <a:p>
+            <a:r>
+              <a:t>hold SQL Server licences; cost is a stated concern.</a:t>
             </a:r>
           </a:p>
           <a:p>
@@ -829,12 +829,12 @@
           </a:p>
           <a:p>
             <a:r>
-              <a:t>  at steady use IF you already own licences. DECIDE + JUSTIFY: pick the cheaper-over-the-term option</a:t>
-            </a:r>
-          </a:p>
-          <a:p>
-            <a:r>
-              <a:t>  for this steady workload, and say why the other was rejected.</a:t>
+              <a:t>at steady use IF you already own licences. DECIDE + JUSTIFY: pick the cheaper-over-the-term option</a:t>
+            </a:r>
+          </a:p>
+          <a:p>
+            <a:r>
+              <a:t>for this steady workload, and say why the other was rejected.</a:t>
             </a:r>
           </a:p>
           <a:p>
@@ -844,7 +844,7 @@
           </a:p>
           <a:p>
             <a:r>
-              <a:t>  decision.</a:t>
+              <a:t>decision.</a:t>
             </a:r>
           </a:p>
           <a:p>
@@ -974,7 +974,7 @@
           </a:p>
           <a:p>
             <a:r>
-              <a:t>   DNS/ACM, bastion/RDP): state it, give the workload facts, weigh it, name the rejected alternative.</a:t>
+              <a:t>DNS/ACM, bastion/RDP): state it, give the workload facts, weigh it, name the rejected alternative.</a:t>
             </a:r>
           </a:p>
           <a:p>
@@ -984,7 +984,7 @@
           </a:p>
           <a:p>
             <a:r>
-              <a:t>   financial-records residency; 7-year retention; business-hours, idle overnight.</a:t>
+              <a:t>financial-records residency; 7-year retention; business-hours, idle overnight.</a:t>
             </a:r>
           </a:p>
           <a:p>
@@ -1109,12 +1109,12 @@
           </a:p>
           <a:p>
             <a:r>
-              <a:t>  connections); an ALARM is a threshold on a metric that fires an action/notification when</a:t>
-            </a:r>
-          </a:p>
-          <a:p>
-            <a:r>
-              <a:t>  crossed; a LOG is a record of events — what happened, and when.</a:t>
+              <a:t>connections); an ALARM is a threshold on a metric that fires an action/notification when</a:t>
+            </a:r>
+          </a:p>
+          <a:p>
+            <a:r>
+              <a:t>crossed; a LOG is a record of events — what happened, and when.</a:t>
             </a:r>
           </a:p>
           <a:p>
@@ -1124,7 +1124,7 @@
           </a:p>
           <a:p>
             <a:r>
-              <a:t>  the whole reason it exists.</a:t>
+              <a:t>the whole reason it exists.</a:t>
             </a:r>
           </a:p>
           <a:p>
@@ -1134,7 +1134,7 @@
           </a:p>
           <a:p>
             <a:r>
-              <a:t>  is the rule watching the number, the log is the diary.</a:t>
+              <a:t>is the rule watching the number, the log is the diary.</a:t>
             </a:r>
           </a:p>
           <a:p>
@@ -1249,12 +1249,12 @@
           </a:p>
           <a:p>
             <a:r>
-              <a:t>  send notifications (e.g. to SNS) or trigger actions (e.g. Auto Scaling); DASHBOARDS visualise,</a:t>
-            </a:r>
-          </a:p>
-          <a:p>
-            <a:r>
-              <a:t>  and CloudWatch LOGS centralises log files.</a:t>
+              <a:t>send notifications (e.g. to SNS) or trigger actions (e.g. Auto Scaling); DASHBOARDS visualise,</a:t>
+            </a:r>
+          </a:p>
+          <a:p>
+            <a:r>
+              <a:t>and CloudWatch LOGS centralises log files.</a:t>
             </a:r>
           </a:p>
           <a:p>
@@ -1269,7 +1269,7 @@
           </a:p>
           <a:p>
             <a:r>
-              <a:t>  now they see what it actually does.</a:t>
+              <a:t>now they see what it actually does.</a:t>
             </a:r>
           </a:p>
           <a:p>
@@ -1549,7 +1549,7 @@
           </a:p>
           <a:p>
             <a:r>
-              <a:t>   5XX / unhealthy host — thresholds per §4.10.</a:t>
+              <a:t>5XX / unhealthy host — thresholds per §4.10.</a:t>
             </a:r>
           </a:p>
           <a:p>
@@ -1559,7 +1559,7 @@
           </a:p>
           <a:p>
             <a:r>
-              <a:t>   CloudWatch Agent for EC2 OS logs.</a:t>
+              <a:t>CloudWatch Agent for EC2 OS logs.</a:t>
             </a:r>
           </a:p>
           <a:p>
@@ -1674,7 +1674,7 @@
           </a:p>
           <a:p>
             <a:r>
-              <a:t>  what was asked. Say it twice — it's the whole point.</a:t>
+              <a:t>what was asked. Say it twice — it's the whole point.</a:t>
             </a:r>
           </a:p>
           <a:p>
@@ -1684,7 +1684,7 @@
           </a:p>
           <a:p>
             <a:r>
-              <a:t>  fix. Four moves, not "have a look."</a:t>
+              <a:t>fix. Four moves, not "have a look."</a:t>
             </a:r>
           </a:p>
           <a:p>
@@ -1694,7 +1694,7 @@
           </a:p>
           <a:p>
             <a:r>
-              <a:t>  a vibe.</a:t>
+              <a:t>a vibe.</a:t>
             </a:r>
           </a:p>
           <a:p>
@@ -1814,7 +1814,7 @@
           </a:p>
           <a:p>
             <a:r>
-              <a:t>  Analyzer), app→database, and scaling — don't re-invent them, consolidate them.</a:t>
+              <a:t>Analyzer), app→database, and scaling — don't re-invent them, consolidate them.</a:t>
             </a:r>
           </a:p>
           <a:p>
@@ -1824,7 +1824,7 @@
           </a:p>
           <a:p>
             <a:r>
-              <a:t>  plainly — RPO = how much data you can afford to lose; RTO = how long to be back up.</a:t>
+              <a:t>plainly — RPO = how much data you can afford to lose; RTO = how long to be back up.</a:t>
             </a:r>
           </a:p>
           <a:p>
@@ -1834,12 +1834,12 @@
           </a:p>
           <a:p>
             <a:r>
-              <a:t>  and single RDS instance are SPOFs. Then the last bullet: that's TOLERABLE for a business-hours</a:t>
-            </a:r>
-          </a:p>
-          <a:p>
-            <a:r>
-              <a:t>  service now, and is precisely the objective of the AT3 HA design.</a:t>
+              <a:t>and single RDS instance are SPOFs. Then the last bullet: that's TOLERABLE for a business-hours</a:t>
+            </a:r>
+          </a:p>
+          <a:p>
+            <a:r>
+              <a:t>service now, and is precisely the objective of the AT3 HA design.</a:t>
             </a:r>
           </a:p>
           <a:p>
@@ -2089,12 +2089,12 @@
           </a:p>
           <a:p>
             <a:r>
-              <a:t>  workload needs Y, weighed against cost/security/residency — and the alternative was worse, for</a:t>
-            </a:r>
-          </a:p>
-          <a:p>
-            <a:r>
-              <a:t>  these reasons" IS (the accent-bold line).</a:t>
+              <a:t>workload needs Y, weighed against cost/security/residency — and the alternative was worse, for</a:t>
+            </a:r>
+          </a:p>
+          <a:p>
+            <a:r>
+              <a:t>these reasons" IS (the accent-bold line).</a:t>
             </a:r>
           </a:p>
           <a:p>
@@ -2104,7 +2104,7 @@
           </a:p>
           <a:p>
             <a:r>
-              <a:t>  trade-off. Generic best practice ("it's more scalable") is not a justification.</a:t>
+              <a:t>trade-off. Generic best practice ("it's more scalable") is not a justification.</a:t>
             </a:r>
           </a:p>
           <a:p>
@@ -2114,7 +2114,7 @@
           </a:p>
           <a:p>
             <a:r>
-              <a:t>  a strong one lives here.</a:t>
+              <a:t>a strong one lives here.</a:t>
             </a:r>
           </a:p>
           <a:p>
@@ -5790,16 +5790,16 @@
             <a:r>
               <a:rPr sz="2400" b="1" i="0">
                 <a:solidFill>
-                  <a:srgbClr val="27B5CE"/>
+                  <a:srgbClr val="EDAB0C"/>
                 </a:solidFill>
                 <a:latin typeface="Roboto"/>
               </a:rPr>
               <a:t>■  </a:t>
             </a:r>
             <a:r>
-              <a:rPr sz="2400" b="1" i="0">
-                <a:solidFill>
-                  <a:srgbClr val="27B5CE"/>
+              <a:rPr sz="2400" b="0" i="0">
+                <a:solidFill>
+                  <a:srgbClr val="2A2929"/>
                 </a:solidFill>
                 <a:latin typeface="Roboto"/>
               </a:rPr>
@@ -6179,16 +6179,16 @@
             <a:r>
               <a:rPr sz="2400" b="1" i="0">
                 <a:solidFill>
-                  <a:srgbClr val="27B5CE"/>
+                  <a:srgbClr val="EDAB0C"/>
                 </a:solidFill>
                 <a:latin typeface="Roboto"/>
               </a:rPr>
               <a:t>■  </a:t>
             </a:r>
             <a:r>
-              <a:rPr sz="2400" b="1" i="0">
-                <a:solidFill>
-                  <a:srgbClr val="27B5CE"/>
+              <a:rPr sz="2400" b="0" i="0">
+                <a:solidFill>
+                  <a:srgbClr val="2A2929"/>
                 </a:solidFill>
                 <a:latin typeface="Roboto"/>
               </a:rPr>
@@ -6550,7 +6550,7 @@
               <a:t>■  </a:t>
             </a:r>
             <a:r>
-              <a:rPr sz="1700" b="1" i="0">
+              <a:rPr sz="1700" b="0" i="0">
                 <a:solidFill>
                   <a:srgbClr val="2A2929"/>
                 </a:solidFill>
@@ -6636,16 +6636,16 @@
             <a:r>
               <a:rPr sz="1700" b="1" i="0">
                 <a:solidFill>
-                  <a:srgbClr val="27B5CE"/>
+                  <a:srgbClr val="EDAB0C"/>
                 </a:solidFill>
                 <a:latin typeface="Roboto"/>
               </a:rPr>
               <a:t>■  </a:t>
             </a:r>
             <a:r>
-              <a:rPr sz="1700" b="1" i="0">
-                <a:solidFill>
-                  <a:srgbClr val="27B5CE"/>
+              <a:rPr sz="1700" b="0" i="0">
+                <a:solidFill>
+                  <a:srgbClr val="2A2929"/>
                 </a:solidFill>
                 <a:latin typeface="Roboto"/>
               </a:rPr>
@@ -8093,16 +8093,16 @@
             <a:r>
               <a:rPr sz="2400" b="1" i="0">
                 <a:solidFill>
-                  <a:srgbClr val="205F61"/>
+                  <a:srgbClr val="EDAB0C"/>
                 </a:solidFill>
                 <a:latin typeface="Roboto"/>
               </a:rPr>
               <a:t>■  </a:t>
             </a:r>
             <a:r>
-              <a:rPr sz="2400" b="1" i="0">
-                <a:solidFill>
-                  <a:srgbClr val="205F61"/>
+              <a:rPr sz="2400" b="0" i="0">
+                <a:solidFill>
+                  <a:srgbClr val="2A2929"/>
                 </a:solidFill>
                 <a:latin typeface="Roboto"/>
               </a:rPr>
@@ -8513,16 +8513,16 @@
             <a:r>
               <a:rPr sz="2400" b="1" i="0">
                 <a:solidFill>
-                  <a:srgbClr val="205F61"/>
+                  <a:srgbClr val="EDAB0C"/>
                 </a:solidFill>
                 <a:latin typeface="Roboto"/>
               </a:rPr>
               <a:t>■  </a:t>
             </a:r>
             <a:r>
-              <a:rPr sz="2400" b="1" i="0">
-                <a:solidFill>
-                  <a:srgbClr val="205F61"/>
+              <a:rPr sz="2400" b="0" i="0">
+                <a:solidFill>
+                  <a:srgbClr val="2A2929"/>
                 </a:solidFill>
                 <a:latin typeface="Roboto"/>
               </a:rPr>
@@ -8783,7 +8783,7 @@
         </p:nvGraphicFramePr>
         <p:xfrm>
           <a:off x="658368" y="1828800"/>
-          <a:ext cx="14630400" cy="2743200"/>
+          <a:ext cx="10881360" cy="2743200"/>
         </p:xfrm>
         <a:graphic>
           <a:graphicData uri="http://schemas.openxmlformats.org/drawingml/2006/table">
@@ -8792,9 +8792,9 @@
                 <a:tableStyleId>{5C22544A-7EE6-4342-B048-85BDC9FD1C3A}</a:tableStyleId>
               </a:tblPr>
               <a:tblGrid>
-                <a:gridCol w="1188720"/>
-                <a:gridCol w="6126480"/>
-                <a:gridCol w="7315200"/>
+                <a:gridCol w="3627120"/>
+                <a:gridCol w="3627120"/>
+                <a:gridCol w="3627120"/>
               </a:tblGrid>
               <a:tr h="457200">
                 <a:tc>
@@ -9582,16 +9582,16 @@
             <a:r>
               <a:rPr sz="2400" b="1" i="0">
                 <a:solidFill>
-                  <a:srgbClr val="205F61"/>
+                  <a:srgbClr val="EDAB0C"/>
                 </a:solidFill>
                 <a:latin typeface="Roboto"/>
               </a:rPr>
               <a:t>■  </a:t>
             </a:r>
             <a:r>
-              <a:rPr sz="2400" b="1" i="0">
-                <a:solidFill>
-                  <a:srgbClr val="205F61"/>
+              <a:rPr sz="2400" b="0" i="0">
+                <a:solidFill>
+                  <a:srgbClr val="2A2929"/>
                 </a:solidFill>
                 <a:latin typeface="Roboto"/>
               </a:rPr>
@@ -9940,16 +9940,16 @@
             <a:r>
               <a:rPr sz="2400" b="1" i="0">
                 <a:solidFill>
-                  <a:srgbClr val="92268F"/>
+                  <a:srgbClr val="EDAB0C"/>
                 </a:solidFill>
                 <a:latin typeface="Roboto"/>
               </a:rPr>
               <a:t>■  </a:t>
             </a:r>
             <a:r>
-              <a:rPr sz="2400" b="1" i="0">
-                <a:solidFill>
-                  <a:srgbClr val="92268F"/>
+              <a:rPr sz="2400" b="0" i="0">
+                <a:solidFill>
+                  <a:srgbClr val="2A2929"/>
                 </a:solidFill>
                 <a:latin typeface="Roboto"/>
               </a:rPr>
@@ -10342,7 +10342,7 @@
               <a:t>■  </a:t>
             </a:r>
             <a:r>
-              <a:rPr sz="1700" b="1" i="0">
+              <a:rPr sz="1700" b="0" i="0">
                 <a:solidFill>
                   <a:srgbClr val="2A2929"/>
                 </a:solidFill>
@@ -10428,16 +10428,16 @@
             <a:r>
               <a:rPr sz="1700" b="1" i="0">
                 <a:solidFill>
-                  <a:srgbClr val="205F61"/>
+                  <a:srgbClr val="EDAB0C"/>
                 </a:solidFill>
                 <a:latin typeface="Roboto"/>
               </a:rPr>
               <a:t>■  </a:t>
             </a:r>
             <a:r>
-              <a:rPr sz="1700" b="1" i="0">
-                <a:solidFill>
-                  <a:srgbClr val="205F61"/>
+              <a:rPr sz="1700" b="0" i="0">
+                <a:solidFill>
+                  <a:srgbClr val="2A2929"/>
                 </a:solidFill>
                 <a:latin typeface="Roboto"/>
               </a:rPr>
@@ -11473,7 +11473,7 @@
             <a:r>
               <a:rPr sz="1800" b="1" i="0">
                 <a:solidFill>
-                  <a:srgbClr val="EDAB0C"/>
+                  <a:srgbClr val="205F61"/>
                 </a:solidFill>
                 <a:latin typeface="Roboto"/>
               </a:rPr>
@@ -11497,7 +11497,7 @@
             <a:avLst/>
           </a:prstGeom>
           <a:solidFill>
-            <a:srgbClr val="EDAB0C"/>
+            <a:srgbClr val="205F61"/>
           </a:solidFill>
           <a:ln>
             <a:noFill/>
@@ -11587,7 +11587,7 @@
             <a:avLst/>
           </a:prstGeom>
           <a:solidFill>
-            <a:srgbClr val="EDAB0C"/>
+            <a:srgbClr val="205F61"/>
           </a:solidFill>
           <a:ln>
             <a:noFill/>
@@ -11716,7 +11716,7 @@
             <a:avLst/>
           </a:prstGeom>
           <a:solidFill>
-            <a:srgbClr val="EDAB0C"/>
+            <a:srgbClr val="205F61"/>
           </a:solidFill>
           <a:ln>
             <a:noFill/>
@@ -11845,7 +11845,7 @@
             <a:avLst/>
           </a:prstGeom>
           <a:solidFill>
-            <a:srgbClr val="EDAB0C"/>
+            <a:srgbClr val="205F61"/>
           </a:solidFill>
           <a:ln>
             <a:noFill/>
@@ -11974,7 +11974,7 @@
             <a:avLst/>
           </a:prstGeom>
           <a:solidFill>
-            <a:srgbClr val="EDAB0C"/>
+            <a:srgbClr val="205F61"/>
           </a:solidFill>
           <a:ln>
             <a:noFill/>
@@ -12103,7 +12103,7 @@
             <a:avLst/>
           </a:prstGeom>
           <a:solidFill>
-            <a:srgbClr val="EDAB0C"/>
+            <a:srgbClr val="205F61"/>
           </a:solidFill>
           <a:ln>
             <a:noFill/>
@@ -12186,7 +12186,7 @@
             <a:avLst/>
           </a:prstGeom>
           <a:solidFill>
-            <a:srgbClr val="EDAB0C"/>
+            <a:srgbClr val="205F61"/>
           </a:solidFill>
           <a:ln>
             <a:noFill/>
@@ -12976,16 +12976,16 @@
             <a:r>
               <a:rPr sz="2400" b="1" i="0">
                 <a:solidFill>
-                  <a:srgbClr val="92268F"/>
+                  <a:srgbClr val="EDAB0C"/>
                 </a:solidFill>
                 <a:latin typeface="Roboto"/>
               </a:rPr>
               <a:t>■  </a:t>
             </a:r>
             <a:r>
-              <a:rPr sz="2400" b="1" i="0">
-                <a:solidFill>
-                  <a:srgbClr val="92268F"/>
+              <a:rPr sz="2400" b="0" i="0">
+                <a:solidFill>
+                  <a:srgbClr val="2A2929"/>
                 </a:solidFill>
                 <a:latin typeface="Roboto"/>
               </a:rPr>
@@ -13334,16 +13334,16 @@
             <a:r>
               <a:rPr sz="1700" b="1" i="0">
                 <a:solidFill>
-                  <a:srgbClr val="92268F"/>
+                  <a:srgbClr val="EDAB0C"/>
                 </a:solidFill>
                 <a:latin typeface="Roboto"/>
               </a:rPr>
               <a:t>■  </a:t>
             </a:r>
             <a:r>
-              <a:rPr sz="1700" b="1" i="0">
-                <a:solidFill>
-                  <a:srgbClr val="92268F"/>
+              <a:rPr sz="1700" b="0" i="0">
+                <a:solidFill>
+                  <a:srgbClr val="2A2929"/>
                 </a:solidFill>
                 <a:latin typeface="Roboto"/>
               </a:rPr>
@@ -13628,7 +13628,7 @@
         </p:nvGraphicFramePr>
         <p:xfrm>
           <a:off x="658368" y="1828800"/>
-          <a:ext cx="14630400" cy="2743200"/>
+          <a:ext cx="10881360" cy="2743200"/>
         </p:xfrm>
         <a:graphic>
           <a:graphicData uri="http://schemas.openxmlformats.org/drawingml/2006/table">
@@ -13637,8 +13637,8 @@
                 <a:tableStyleId>{5C22544A-7EE6-4342-B048-85BDC9FD1C3A}</a:tableStyleId>
               </a:tblPr>
               <a:tblGrid>
-                <a:gridCol w="7772400"/>
-                <a:gridCol w="6858000"/>
+                <a:gridCol w="5440680"/>
+                <a:gridCol w="5440680"/>
               </a:tblGrid>
               <a:tr h="457200">
                 <a:tc>
@@ -14751,7 +14751,7 @@
               <a:t>■  </a:t>
             </a:r>
             <a:r>
-              <a:rPr sz="1700" b="1" i="0">
+              <a:rPr sz="1700" b="0" i="0">
                 <a:solidFill>
                   <a:srgbClr val="2A2929"/>
                 </a:solidFill>
@@ -14837,16 +14837,16 @@
             <a:r>
               <a:rPr sz="1700" b="1" i="0">
                 <a:solidFill>
-                  <a:srgbClr val="92268F"/>
+                  <a:srgbClr val="EDAB0C"/>
                 </a:solidFill>
                 <a:latin typeface="Roboto"/>
               </a:rPr>
               <a:t>■  </a:t>
             </a:r>
             <a:r>
-              <a:rPr sz="1700" b="1" i="0">
-                <a:solidFill>
-                  <a:srgbClr val="92268F"/>
+              <a:rPr sz="1700" b="0" i="0">
+                <a:solidFill>
+                  <a:srgbClr val="2A2929"/>
                 </a:solidFill>
                 <a:latin typeface="Roboto"/>
               </a:rPr>

--- a/S1-CL1-Cloud-Design-Build/delivery/topic_09/Topic_09_Slides.pptx
+++ b/S1-CL1-Cloud-Design-Build/delivery/topic_09/Topic_09_Slides.pptx
@@ -8005,7 +8005,7 @@
                 </a:solidFill>
                 <a:latin typeface="Roboto Light"/>
               </a:rPr>
-              <a:t>security *of* the cloud, security *in* it</a:t>
+              <a:t>security of the cloud, security in it</a:t>
             </a:r>
           </a:p>
         </p:txBody>
